--- a/downloads/teams-phone-deck.pptx
+++ b/downloads/teams-phone-deck.pptx
@@ -19,6 +19,25 @@
     <p:sldId id="270" r:id="rId15"/>
     <p:sldId id="271" r:id="rId16"/>
     <p:sldId id="272" r:id="rId17"/>
+    <p:sldId id="273" r:id="rId18"/>
+    <p:sldId id="274" r:id="rId19"/>
+    <p:sldId id="275" r:id="rId20"/>
+    <p:sldId id="276" r:id="rId21"/>
+    <p:sldId id="277" r:id="rId22"/>
+    <p:sldId id="278" r:id="rId23"/>
+    <p:sldId id="279" r:id="rId24"/>
+    <p:sldId id="280" r:id="rId25"/>
+    <p:sldId id="281" r:id="rId26"/>
+    <p:sldId id="282" r:id="rId27"/>
+    <p:sldId id="283" r:id="rId28"/>
+    <p:sldId id="284" r:id="rId29"/>
+    <p:sldId id="285" r:id="rId30"/>
+    <p:sldId id="286" r:id="rId31"/>
+    <p:sldId id="287" r:id="rId32"/>
+    <p:sldId id="288" r:id="rId33"/>
+    <p:sldId id="289" r:id="rId34"/>
+    <p:sldId id="290" r:id="rId35"/>
+    <p:sldId id="291" r:id="rId36"/>
   </p:sldIdLst>
   <p:sldSz cx="9144000" cy="5143500"/>
 </p:presentation>
@@ -49,16 +68,16 @@
         </p:nvSpPr>
         <p:spPr>
           <a:xfrm>
-            <a:off x="400000" y="300000"/>
-            <a:ext cx="8000000" cy="800000"/>
-          </a:xfrm>
-        </p:spPr>
-        <p:txBody>
-          <a:bodyPr/>
-          <a:lstStyle/>
-          <a:p>
-            <a:r>
-              <a:rPr lang="en-US" sz="3200"/>
+            <a:off x="400000" y="240000"/>
+            <a:ext cx="8400000" cy="700000"/>
+          </a:xfrm>
+        </p:spPr>
+        <p:txBody>
+          <a:bodyPr/>
+          <a:lstStyle/>
+          <a:p>
+            <a:r>
+              <a:rPr lang="en-US" sz="2800"/>
               <a:t>Foundations</a:t>
             </a:r>
           </a:p>
@@ -72,17 +91,23 @@
         </p:nvSpPr>
         <p:spPr>
           <a:xfrm>
-            <a:off x="400000" y="1400000"/>
-            <a:ext cx="8000000" cy="3000000"/>
-          </a:xfrm>
-        </p:spPr>
-        <p:txBody>
-          <a:bodyPr/>
-          <a:lstStyle/>
-          <a:p>
-            <a:r>
-              <a:rPr lang="en-US" sz="1800"/>
-              <a:t>A voice change is a tenant change. Identity, domain, and admin role decide whether the later work can exist. Confirm before relying. Independent free learning-only project.</a:t>
+            <a:off x="400000" y="1000000"/>
+            <a:ext cx="8400000" cy="3800000"/>
+          </a:xfrm>
+        </p:spPr>
+        <p:txBody>
+          <a:bodyPr/>
+          <a:lstStyle/>
+          <a:p>
+            <a:r>
+              <a:rPr lang="en-US" sz="1400"/>
+              <a:t>A voice change is a tenant change. Identity, domain, and admin role decide whether the later work can exist. Confirm before relying.</a:t>
+            </a:r>
+          </a:p>
+          <a:p>
+            <a:r>
+              <a:rPr lang="en-US" sz="1400"/>
+              <a:t>Independent free learning-only project.</a:t>
             </a:r>
           </a:p>
         </p:txBody>
@@ -120,16 +145,16 @@
         </p:nvSpPr>
         <p:spPr>
           <a:xfrm>
-            <a:off x="400000" y="300000"/>
-            <a:ext cx="8000000" cy="800000"/>
-          </a:xfrm>
-        </p:spPr>
-        <p:txBody>
-          <a:bodyPr/>
-          <a:lstStyle/>
-          <a:p>
-            <a:r>
-              <a:rPr lang="en-US" sz="3200"/>
+            <a:off x="400000" y="240000"/>
+            <a:ext cx="8400000" cy="700000"/>
+          </a:xfrm>
+        </p:spPr>
+        <p:txBody>
+          <a:bodyPr/>
+          <a:lstStyle/>
+          <a:p>
+            <a:r>
+              <a:rPr lang="en-US" sz="2800"/>
               <a:t>Session border controllers</a:t>
             </a:r>
           </a:p>
@@ -143,17 +168,23 @@
         </p:nvSpPr>
         <p:spPr>
           <a:xfrm>
-            <a:off x="400000" y="1400000"/>
-            <a:ext cx="8000000" cy="3000000"/>
-          </a:xfrm>
-        </p:spPr>
-        <p:txBody>
-          <a:bodyPr/>
-          <a:lstStyle/>
-          <a:p>
-            <a:r>
-              <a:rPr lang="en-US" sz="1800"/>
-              <a:t>Microsoft supports Direct Routing on certified SBCs. AudioCodes, Ribbon, Oracle, and Cisco CUBE are families you will meet. The support path starts with the vendor. Confirm before relying. Independent free learning-only project.</a:t>
+            <a:off x="400000" y="1000000"/>
+            <a:ext cx="8400000" cy="3800000"/>
+          </a:xfrm>
+        </p:spPr>
+        <p:txBody>
+          <a:bodyPr/>
+          <a:lstStyle/>
+          <a:p>
+            <a:r>
+              <a:rPr lang="en-US" sz="1400"/>
+              <a:t>Microsoft supports Direct Routing on certified SBCs. AudioCodes, Ribbon, Oracle, and Cisco CUBE are families you will meet. The support path starts with the vendor. Confirm before relying.</a:t>
+            </a:r>
+          </a:p>
+          <a:p>
+            <a:r>
+              <a:rPr lang="en-US" sz="1400"/>
+              <a:t>Independent free learning-only project.</a:t>
             </a:r>
           </a:p>
         </p:txBody>
@@ -191,16 +222,16 @@
         </p:nvSpPr>
         <p:spPr>
           <a:xfrm>
-            <a:off x="400000" y="300000"/>
-            <a:ext cx="8000000" cy="800000"/>
-          </a:xfrm>
-        </p:spPr>
-        <p:txBody>
-          <a:bodyPr/>
-          <a:lstStyle/>
-          <a:p>
-            <a:r>
-              <a:rPr lang="en-US" sz="3200"/>
+            <a:off x="400000" y="240000"/>
+            <a:ext cx="8400000" cy="700000"/>
+          </a:xfrm>
+        </p:spPr>
+        <p:txBody>
+          <a:bodyPr/>
+          <a:lstStyle/>
+          <a:p>
+            <a:r>
+              <a:rPr lang="en-US" sz="2800"/>
               <a:t>TLS, certificates, SIP</a:t>
             </a:r>
           </a:p>
@@ -214,17 +245,23 @@
         </p:nvSpPr>
         <p:spPr>
           <a:xfrm>
-            <a:off x="400000" y="1400000"/>
-            <a:ext cx="8000000" cy="3000000"/>
-          </a:xfrm>
-        </p:spPr>
-        <p:txBody>
-          <a:bodyPr/>
-          <a:lstStyle/>
-          <a:p>
-            <a:r>
-              <a:rPr lang="en-US" sz="1800"/>
-              <a:t>A dial-plan argument is wasted when the certificate name is wrong. OPTIONS tell you the trunk is alive. Confirm before relying. Independent free learning-only project.</a:t>
+            <a:off x="400000" y="1000000"/>
+            <a:ext cx="8400000" cy="3800000"/>
+          </a:xfrm>
+        </p:spPr>
+        <p:txBody>
+          <a:bodyPr/>
+          <a:lstStyle/>
+          <a:p>
+            <a:r>
+              <a:rPr lang="en-US" sz="1400"/>
+              <a:t>A dial-plan argument is wasted when the certificate name is wrong. OPTIONS tell you the trunk is alive. Confirm before relying.</a:t>
+            </a:r>
+          </a:p>
+          <a:p>
+            <a:r>
+              <a:rPr lang="en-US" sz="1400"/>
+              <a:t>Independent free learning-only project.</a:t>
             </a:r>
           </a:p>
         </p:txBody>
@@ -262,16 +299,16 @@
         </p:nvSpPr>
         <p:spPr>
           <a:xfrm>
-            <a:off x="400000" y="300000"/>
-            <a:ext cx="8000000" cy="800000"/>
-          </a:xfrm>
-        </p:spPr>
-        <p:txBody>
-          <a:bodyPr/>
-          <a:lstStyle/>
-          <a:p>
-            <a:r>
-              <a:rPr lang="en-US" sz="3200"/>
+            <a:off x="400000" y="240000"/>
+            <a:ext cx="8400000" cy="700000"/>
+          </a:xfrm>
+        </p:spPr>
+        <p:txBody>
+          <a:bodyPr/>
+          <a:lstStyle/>
+          <a:p>
+            <a:r>
+              <a:rPr lang="en-US" sz="2800"/>
               <a:t>Troubleshooting</a:t>
             </a:r>
           </a:p>
@@ -285,17 +322,23 @@
         </p:nvSpPr>
         <p:spPr>
           <a:xfrm>
-            <a:off x="400000" y="1400000"/>
-            <a:ext cx="8000000" cy="3000000"/>
-          </a:xfrm>
-        </p:spPr>
-        <p:txBody>
-          <a:bodyPr/>
-          <a:lstStyle/>
-          <a:p>
-            <a:r>
-              <a:rPr lang="en-US" sz="1800"/>
-              <a:t>Call Analytics is one call. CQD is a building. The SBC trace is the ladder. Mixing them up wastes the hour. Confirm before relying. Independent free learning-only project.</a:t>
+            <a:off x="400000" y="1000000"/>
+            <a:ext cx="8400000" cy="3800000"/>
+          </a:xfrm>
+        </p:spPr>
+        <p:txBody>
+          <a:bodyPr/>
+          <a:lstStyle/>
+          <a:p>
+            <a:r>
+              <a:rPr lang="en-US" sz="1400"/>
+              <a:t>Call Analytics is one call. CQD is a building. The SBC trace is the ladder. Mixing them up wastes the hour. Confirm before relying.</a:t>
+            </a:r>
+          </a:p>
+          <a:p>
+            <a:r>
+              <a:rPr lang="en-US" sz="1400"/>
+              <a:t>Independent free learning-only project.</a:t>
             </a:r>
           </a:p>
         </p:txBody>
@@ -333,16 +376,16 @@
         </p:nvSpPr>
         <p:spPr>
           <a:xfrm>
-            <a:off x="400000" y="300000"/>
-            <a:ext cx="8000000" cy="800000"/>
-          </a:xfrm>
-        </p:spPr>
-        <p:txBody>
-          <a:bodyPr/>
-          <a:lstStyle/>
-          <a:p>
-            <a:r>
-              <a:rPr lang="en-US" sz="3200"/>
+            <a:off x="400000" y="240000"/>
+            <a:ext cx="8400000" cy="700000"/>
+          </a:xfrm>
+        </p:spPr>
+        <p:txBody>
+          <a:bodyPr/>
+          <a:lstStyle/>
+          <a:p>
+            <a:r>
+              <a:rPr lang="en-US" sz="2800"/>
               <a:t>Dynamics contact center</a:t>
             </a:r>
           </a:p>
@@ -356,17 +399,23 @@
         </p:nvSpPr>
         <p:spPr>
           <a:xfrm>
-            <a:off x="400000" y="1400000"/>
-            <a:ext cx="8000000" cy="3000000"/>
-          </a:xfrm>
-        </p:spPr>
-        <p:txBody>
-          <a:bodyPr/>
-          <a:lstStyle/>
-          <a:p>
-            <a:r>
-              <a:rPr lang="en-US" sz="1800"/>
-              <a:t>Dynamics 365 Contact Center is Microsoft’s CCaaS. Unified routing, channels, and Copilot are the job, and AB-250 is the exam that matches it. Confirm before relying. Independent free learning-only project.</a:t>
+            <a:off x="400000" y="1000000"/>
+            <a:ext cx="8400000" cy="3800000"/>
+          </a:xfrm>
+        </p:spPr>
+        <p:txBody>
+          <a:bodyPr/>
+          <a:lstStyle/>
+          <a:p>
+            <a:r>
+              <a:rPr lang="en-US" sz="1400"/>
+              <a:t>Dynamics 365 Contact Center is Microsoft’s CCaaS. Unified routing, channels, and Copilot are the job, and AB-250 is the exam that matches it. Confirm before relying.</a:t>
+            </a:r>
+          </a:p>
+          <a:p>
+            <a:r>
+              <a:rPr lang="en-US" sz="1400"/>
+              <a:t>Independent free learning-only project.</a:t>
             </a:r>
           </a:p>
         </p:txBody>
@@ -404,16 +453,16 @@
         </p:nvSpPr>
         <p:spPr>
           <a:xfrm>
-            <a:off x="400000" y="300000"/>
-            <a:ext cx="8000000" cy="800000"/>
-          </a:xfrm>
-        </p:spPr>
-        <p:txBody>
-          <a:bodyPr/>
-          <a:lstStyle/>
-          <a:p>
-            <a:r>
-              <a:rPr lang="en-US" sz="3200"/>
+            <a:off x="400000" y="240000"/>
+            <a:ext cx="8400000" cy="700000"/>
+          </a:xfrm>
+        </p:spPr>
+        <p:txBody>
+          <a:bodyPr/>
+          <a:lstStyle/>
+          <a:p>
+            <a:r>
+              <a:rPr lang="en-US" sz="2800"/>
               <a:t>Coexistence and CCaaS</a:t>
             </a:r>
           </a:p>
@@ -427,17 +476,23 @@
         </p:nvSpPr>
         <p:spPr>
           <a:xfrm>
-            <a:off x="400000" y="1400000"/>
-            <a:ext cx="8000000" cy="3000000"/>
-          </a:xfrm>
-        </p:spPr>
-        <p:txBody>
-          <a:bodyPr/>
-          <a:lstStyle/>
-          <a:p>
-            <a:r>
-              <a:rPr lang="en-US" sz="1800"/>
-              <a:t>Connect, Extend, and Unify are different media paths. CUCM, Webex, UCCE, Genesys, and Amazon Connect each need a named bridge, not a slogan. Confirm before relying. Independent free learning-only project.</a:t>
+            <a:off x="400000" y="1000000"/>
+            <a:ext cx="8400000" cy="3800000"/>
+          </a:xfrm>
+        </p:spPr>
+        <p:txBody>
+          <a:bodyPr/>
+          <a:lstStyle/>
+          <a:p>
+            <a:r>
+              <a:rPr lang="en-US" sz="1400"/>
+              <a:t>Connect, Extend, and Unify are different media paths. CUCM, Webex, UCCE, Genesys, and Amazon Connect each need a named bridge, not a slogan. Confirm before relying.</a:t>
+            </a:r>
+          </a:p>
+          <a:p>
+            <a:r>
+              <a:rPr lang="en-US" sz="1400"/>
+              <a:t>Independent free learning-only project.</a:t>
             </a:r>
           </a:p>
         </p:txBody>
@@ -475,16 +530,16 @@
         </p:nvSpPr>
         <p:spPr>
           <a:xfrm>
-            <a:off x="400000" y="300000"/>
-            <a:ext cx="8000000" cy="800000"/>
-          </a:xfrm>
-        </p:spPr>
-        <p:txBody>
-          <a:bodyPr/>
-          <a:lstStyle/>
-          <a:p>
-            <a:r>
-              <a:rPr lang="en-US" sz="3200"/>
+            <a:off x="400000" y="240000"/>
+            <a:ext cx="8400000" cy="700000"/>
+          </a:xfrm>
+        </p:spPr>
+        <p:txBody>
+          <a:bodyPr/>
+          <a:lstStyle/>
+          <a:p>
+            <a:r>
+              <a:rPr lang="en-US" sz="2800"/>
               <a:t>ACS, Speech, Copilot</a:t>
             </a:r>
           </a:p>
@@ -498,17 +553,23 @@
         </p:nvSpPr>
         <p:spPr>
           <a:xfrm>
-            <a:off x="400000" y="1400000"/>
-            <a:ext cx="8000000" cy="3000000"/>
-          </a:xfrm>
-        </p:spPr>
-        <p:txBody>
-          <a:bodyPr/>
-          <a:lstStyle/>
-          <a:p>
-            <a:r>
-              <a:rPr lang="en-US" sz="1800"/>
-              <a:t>Call Automation is a server-side call with events. Speech and Copilot Studio can sit in the recognize step. Foundry is where you evaluate a model, not a second phone system. Confirm before relying. Independent free learning-only project.</a:t>
+            <a:off x="400000" y="1000000"/>
+            <a:ext cx="8400000" cy="3800000"/>
+          </a:xfrm>
+        </p:spPr>
+        <p:txBody>
+          <a:bodyPr/>
+          <a:lstStyle/>
+          <a:p>
+            <a:r>
+              <a:rPr lang="en-US" sz="1400"/>
+              <a:t>Call Automation is a server-side call with events. Speech and Copilot Studio can sit in the recognize step. Foundry is where you evaluate a model, not a second phone system. Confirm before relying.</a:t>
+            </a:r>
+          </a:p>
+          <a:p>
+            <a:r>
+              <a:rPr lang="en-US" sz="1400"/>
+              <a:t>Independent free learning-only project.</a:t>
             </a:r>
           </a:p>
         </p:txBody>
@@ -546,16 +607,16 @@
         </p:nvSpPr>
         <p:spPr>
           <a:xfrm>
-            <a:off x="400000" y="300000"/>
-            <a:ext cx="8000000" cy="800000"/>
-          </a:xfrm>
-        </p:spPr>
-        <p:txBody>
-          <a:bodyPr/>
-          <a:lstStyle/>
-          <a:p>
-            <a:r>
-              <a:rPr lang="en-US" sz="3200"/>
+            <a:off x="400000" y="240000"/>
+            <a:ext cx="8400000" cy="700000"/>
+          </a:xfrm>
+        </p:spPr>
+        <p:txBody>
+          <a:bodyPr/>
+          <a:lstStyle/>
+          <a:p>
+            <a:r>
+              <a:rPr lang="en-US" sz="2800"/>
               <a:t>Certifications and status</a:t>
             </a:r>
           </a:p>
@@ -569,17 +630,23 @@
         </p:nvSpPr>
         <p:spPr>
           <a:xfrm>
-            <a:off x="400000" y="1400000"/>
-            <a:ext cx="8000000" cy="3000000"/>
-          </a:xfrm>
-        </p:spPr>
-        <p:txBody>
-          <a:bodyPr/>
-          <a:lstStyle/>
-          <a:p>
-            <a:r>
-              <a:rPr lang="en-US" sz="1800"/>
-              <a:t>MS-700 is still live, with a skills update on Oct 27 2026; it is NOT retired and has no replacement. MB-280 retired Jul 31 2026, with AB-210 as its successor; AB-210 is in beta. Confirm before relying. Independent free learning-only project.</a:t>
+            <a:off x="400000" y="1000000"/>
+            <a:ext cx="8400000" cy="3800000"/>
+          </a:xfrm>
+        </p:spPr>
+        <p:txBody>
+          <a:bodyPr/>
+          <a:lstStyle/>
+          <a:p>
+            <a:r>
+              <a:rPr lang="en-US" sz="1400"/>
+              <a:t>MS-700 is still live, with a skills update on Oct 27 2026; it is NOT retired and has no replacement. MB-280 retired Jul 31 2026, with AB-210 as its successor; AB-210 is in beta. Confirm before relying.</a:t>
+            </a:r>
+          </a:p>
+          <a:p>
+            <a:r>
+              <a:rPr lang="en-US" sz="1400"/>
+              <a:t>Independent free learning-only project.</a:t>
             </a:r>
           </a:p>
         </p:txBody>
@@ -617,16 +684,16 @@
         </p:nvSpPr>
         <p:spPr>
           <a:xfrm>
-            <a:off x="400000" y="300000"/>
-            <a:ext cx="8000000" cy="800000"/>
-          </a:xfrm>
-        </p:spPr>
-        <p:txBody>
-          <a:bodyPr/>
-          <a:lstStyle/>
-          <a:p>
-            <a:r>
-              <a:rPr lang="en-US" sz="3200"/>
+            <a:off x="400000" y="240000"/>
+            <a:ext cx="8400000" cy="700000"/>
+          </a:xfrm>
+        </p:spPr>
+        <p:txBody>
+          <a:bodyPr/>
+          <a:lstStyle/>
+          <a:p>
+            <a:r>
+              <a:rPr lang="en-US" sz="2800"/>
               <a:t>Ecosystem</a:t>
             </a:r>
           </a:p>
@@ -640,17 +707,201 @@
         </p:nvSpPr>
         <p:spPr>
           <a:xfrm>
-            <a:off x="400000" y="1400000"/>
-            <a:ext cx="8000000" cy="3000000"/>
-          </a:xfrm>
-        </p:spPr>
-        <p:txBody>
-          <a:bodyPr/>
-          <a:lstStyle/>
-          <a:p>
-            <a:r>
-              <a:rPr lang="en-US" sz="1800"/>
-              <a:t>The call is not finished when it rings. Recording, workforce management, emergency location, analytics, CRM, and agents attach at seams you can name. Confirm before relying. Independent free learning-only project.</a:t>
+            <a:off x="400000" y="1000000"/>
+            <a:ext cx="8400000" cy="3800000"/>
+          </a:xfrm>
+        </p:spPr>
+        <p:txBody>
+          <a:bodyPr/>
+          <a:lstStyle/>
+          <a:p>
+            <a:r>
+              <a:rPr lang="en-US" sz="1400"/>
+              <a:t>The call is not finished when it rings. Recording, workforce management, emergency location, analytics, CRM, and agents attach at seams you can name. Confirm before relying.</a:t>
+            </a:r>
+          </a:p>
+          <a:p>
+            <a:r>
+              <a:rPr lang="en-US" sz="1400"/>
+              <a:t>Independent free learning-only project.</a:t>
+            </a:r>
+          </a:p>
+        </p:txBody>
+      </p:sp>
+    </p:spTree>
+  </p:cSld>
+  <p:clrMapOvr>
+    <a:masterClrMapping/>
+  </p:clrMapOvr>
+</p:sld>
+</file>
+
+<file path=ppt/slides/slide18.xml><?xml version="1.0" encoding="utf-8"?>
+<p:sld xmlns:a="http://schemas.openxmlformats.org/drawingml/2006/main" xmlns:r="http://schemas.openxmlformats.org/officeDocument/2006/relationships" xmlns:p="http://schemas.openxmlformats.org/presentationml/2006/main">
+  <p:cSld>
+    <p:spTree>
+      <p:nvGrpSpPr>
+        <p:cNvPr id="1" name=""/>
+        <p:cNvGrpSpPr/>
+        <p:nvPr/>
+      </p:nvGrpSpPr>
+      <p:grpSpPr>
+        <a:xfrm>
+          <a:off x="0" y="0"/>
+          <a:ext cx="0" cy="0"/>
+          <a:chOff x="0" y="0"/>
+          <a:chExt cx="0" cy="0"/>
+        </a:xfrm>
+      </p:grpSpPr>
+      <p:sp>
+        <p:nvSpPr>
+          <p:cNvPr id="2" name="Title"/>
+          <p:cNvSpPr/>
+          <p:nvPr/>
+        </p:nvSpPr>
+        <p:spPr>
+          <a:xfrm>
+            <a:off x="400000" y="240000"/>
+            <a:ext cx="8400000" cy="700000"/>
+          </a:xfrm>
+        </p:spPr>
+        <p:txBody>
+          <a:bodyPr/>
+          <a:lstStyle/>
+          <a:p>
+            <a:r>
+              <a:rPr lang="en-US" sz="2800"/>
+              <a:t>Sources and go deeper</a:t>
+            </a:r>
+          </a:p>
+        </p:txBody>
+      </p:sp>
+      <p:sp>
+        <p:nvSpPr>
+          <p:cNvPr id="3" name="Body"/>
+          <p:cNvSpPr/>
+          <p:nvPr/>
+        </p:nvSpPr>
+        <p:spPr>
+          <a:xfrm>
+            <a:off x="400000" y="1000000"/>
+            <a:ext cx="8400000" cy="3800000"/>
+          </a:xfrm>
+        </p:spPr>
+        <p:txBody>
+          <a:bodyPr/>
+          <a:lstStyle/>
+          <a:p>
+            <a:r>
+              <a:rPr lang="en-US" sz="1400"/>
+              <a:t>Set up Teams Phone — learn — https://learn.microsoft.com/en-us/microsoftteams/setting-up-your-phone-system — last checked 2026-10</a:t>
+            </a:r>
+          </a:p>
+          <a:p>
+            <a:r>
+              <a:rPr lang="en-US" sz="1400"/>
+              <a:t>Use Teams admin roles — learn — https://learn.microsoft.com/en-us/microsoftteams/using-admin-roles — last checked 2026-10</a:t>
+            </a:r>
+          </a:p>
+          <a:p>
+            <a:r>
+              <a:rPr lang="en-US" sz="1400"/>
+              <a:t>Microsoft 365 — wikipedia — https://en.wikipedia.org/wiki/Microsoft_365 — last checked 2026-10</a:t>
+            </a:r>
+          </a:p>
+          <a:p>
+            <a:r>
+              <a:rPr lang="en-US" sz="1400"/>
+              <a:t>Microsoft Teams — wikipedia — https://en.wikipedia.org/wiki/Microsoft_Teams — last checked 2026-10</a:t>
+            </a:r>
+          </a:p>
+        </p:txBody>
+      </p:sp>
+    </p:spTree>
+  </p:cSld>
+  <p:clrMapOvr>
+    <a:masterClrMapping/>
+  </p:clrMapOvr>
+</p:sld>
+</file>
+
+<file path=ppt/slides/slide19.xml><?xml version="1.0" encoding="utf-8"?>
+<p:sld xmlns:a="http://schemas.openxmlformats.org/drawingml/2006/main" xmlns:r="http://schemas.openxmlformats.org/officeDocument/2006/relationships" xmlns:p="http://schemas.openxmlformats.org/presentationml/2006/main">
+  <p:cSld>
+    <p:spTree>
+      <p:nvGrpSpPr>
+        <p:cNvPr id="1" name=""/>
+        <p:cNvGrpSpPr/>
+        <p:nvPr/>
+      </p:nvGrpSpPr>
+      <p:grpSpPr>
+        <a:xfrm>
+          <a:off x="0" y="0"/>
+          <a:ext cx="0" cy="0"/>
+          <a:chOff x="0" y="0"/>
+          <a:chExt cx="0" cy="0"/>
+        </a:xfrm>
+      </p:grpSpPr>
+      <p:sp>
+        <p:nvSpPr>
+          <p:cNvPr id="2" name="Title"/>
+          <p:cNvSpPr/>
+          <p:nvPr/>
+        </p:nvSpPr>
+        <p:spPr>
+          <a:xfrm>
+            <a:off x="400000" y="240000"/>
+            <a:ext cx="8400000" cy="700000"/>
+          </a:xfrm>
+        </p:spPr>
+        <p:txBody>
+          <a:bodyPr/>
+          <a:lstStyle/>
+          <a:p>
+            <a:r>
+              <a:rPr lang="en-US" sz="2800"/>
+              <a:t>Sources and go deeper</a:t>
+            </a:r>
+          </a:p>
+        </p:txBody>
+      </p:sp>
+      <p:sp>
+        <p:nvSpPr>
+          <p:cNvPr id="3" name="Body"/>
+          <p:cNvSpPr/>
+          <p:nvPr/>
+        </p:nvSpPr>
+        <p:spPr>
+          <a:xfrm>
+            <a:off x="400000" y="1000000"/>
+            <a:ext cx="8400000" cy="3800000"/>
+          </a:xfrm>
+        </p:spPr>
+        <p:txBody>
+          <a:bodyPr/>
+          <a:lstStyle/>
+          <a:p>
+            <a:r>
+              <a:rPr lang="en-US" sz="1400"/>
+              <a:t>Microsoft Teams blog index — community — https://techcommunity.microsoft.com/category/microsoftteams/blog/microsoftteamsblog — last checked 2026-10</a:t>
+            </a:r>
+          </a:p>
+          <a:p>
+            <a:r>
+              <a:rPr lang="en-US" sz="1400"/>
+              <a:t>Manage resource accounts — learn — https://learn.microsoft.com/en-us/microsoftteams/aa-cq-manage-resource-accounts — last checked 2026-10</a:t>
+            </a:r>
+          </a:p>
+          <a:p>
+            <a:r>
+              <a:rPr lang="en-US" sz="1400"/>
+              <a:t>Plan Direct Routing — learn — https://learn.microsoft.com/en-us/microsoftteams/direct-routing-plan — last checked 2026-10</a:t>
+            </a:r>
+          </a:p>
+          <a:p>
+            <a:r>
+              <a:rPr lang="en-US" sz="1400"/>
+              <a:t>Security, Compliance, and Identity Fundamentals — learn — https://learn.microsoft.com/en-us/credentials/certifications/security-compliance-and-identity-fundamentals/ — last checked 2026-10</a:t>
             </a:r>
           </a:p>
         </p:txBody>
@@ -688,16 +939,16 @@
         </p:nvSpPr>
         <p:spPr>
           <a:xfrm>
-            <a:off x="400000" y="300000"/>
-            <a:ext cx="8000000" cy="800000"/>
-          </a:xfrm>
-        </p:spPr>
-        <p:txBody>
-          <a:bodyPr/>
-          <a:lstStyle/>
-          <a:p>
-            <a:r>
-              <a:rPr lang="en-US" sz="3200"/>
+            <a:off x="400000" y="240000"/>
+            <a:ext cx="8400000" cy="700000"/>
+          </a:xfrm>
+        </p:spPr>
+        <p:txBody>
+          <a:bodyPr/>
+          <a:lstStyle/>
+          <a:p>
+            <a:r>
+              <a:rPr lang="en-US" sz="2800"/>
               <a:t>Licensing</a:t>
             </a:r>
           </a:p>
@@ -711,17 +962,913 @@
         </p:nvSpPr>
         <p:spPr>
           <a:xfrm>
-            <a:off x="400000" y="1400000"/>
-            <a:ext cx="8000000" cy="3000000"/>
-          </a:xfrm>
-        </p:spPr>
-        <p:txBody>
-          <a:bodyPr/>
-          <a:lstStyle/>
-          <a:p>
-            <a:r>
-              <a:rPr lang="en-US" sz="1800"/>
-              <a:t>The wrong SKU looks like a routing bug. Teams Phone, Calling Plans, Audio Conferencing, resource accounts, and Teams Premium are different purchases. Confirm before relying. Independent free learning-only project.</a:t>
+            <a:off x="400000" y="1000000"/>
+            <a:ext cx="8400000" cy="3800000"/>
+          </a:xfrm>
+        </p:spPr>
+        <p:txBody>
+          <a:bodyPr/>
+          <a:lstStyle/>
+          <a:p>
+            <a:r>
+              <a:rPr lang="en-US" sz="1400"/>
+              <a:t>The wrong SKU looks like a routing bug. Teams Phone, Calling Plans, Audio Conferencing, resource accounts, and Teams Premium are different purchases. Confirm before relying.</a:t>
+            </a:r>
+          </a:p>
+          <a:p>
+            <a:r>
+              <a:rPr lang="en-US" sz="1400"/>
+              <a:t>Independent free learning-only project.</a:t>
+            </a:r>
+          </a:p>
+        </p:txBody>
+      </p:sp>
+    </p:spTree>
+  </p:cSld>
+  <p:clrMapOvr>
+    <a:masterClrMapping/>
+  </p:clrMapOvr>
+</p:sld>
+</file>
+
+<file path=ppt/slides/slide20.xml><?xml version="1.0" encoding="utf-8"?>
+<p:sld xmlns:a="http://schemas.openxmlformats.org/drawingml/2006/main" xmlns:r="http://schemas.openxmlformats.org/officeDocument/2006/relationships" xmlns:p="http://schemas.openxmlformats.org/presentationml/2006/main">
+  <p:cSld>
+    <p:spTree>
+      <p:nvGrpSpPr>
+        <p:cNvPr id="1" name=""/>
+        <p:cNvGrpSpPr/>
+        <p:nvPr/>
+      </p:nvGrpSpPr>
+      <p:grpSpPr>
+        <a:xfrm>
+          <a:off x="0" y="0"/>
+          <a:ext cx="0" cy="0"/>
+          <a:chOff x="0" y="0"/>
+          <a:chExt cx="0" cy="0"/>
+        </a:xfrm>
+      </p:grpSpPr>
+      <p:sp>
+        <p:nvSpPr>
+          <p:cNvPr id="2" name="Title"/>
+          <p:cNvSpPr/>
+          <p:nvPr/>
+        </p:nvSpPr>
+        <p:spPr>
+          <a:xfrm>
+            <a:off x="400000" y="240000"/>
+            <a:ext cx="8400000" cy="700000"/>
+          </a:xfrm>
+        </p:spPr>
+        <p:txBody>
+          <a:bodyPr/>
+          <a:lstStyle/>
+          <a:p>
+            <a:r>
+              <a:rPr lang="en-US" sz="2800"/>
+              <a:t>Sources and go deeper</a:t>
+            </a:r>
+          </a:p>
+        </p:txBody>
+      </p:sp>
+      <p:sp>
+        <p:nvSpPr>
+          <p:cNvPr id="3" name="Body"/>
+          <p:cNvSpPr/>
+          <p:nvPr/>
+        </p:nvSpPr>
+        <p:spPr>
+          <a:xfrm>
+            <a:off x="400000" y="1000000"/>
+            <a:ext cx="8400000" cy="3800000"/>
+          </a:xfrm>
+        </p:spPr>
+        <p:txBody>
+          <a:bodyPr/>
+          <a:lstStyle/>
+          <a:p>
+            <a:r>
+              <a:rPr lang="en-US" sz="1400"/>
+              <a:t>Cloud Voicemail — confirm — https://learn.microsoft.com/en-us/microsoftteams/cloud-voicemail — last checked 2026-10. Did not open when checked.</a:t>
+            </a:r>
+          </a:p>
+          <a:p>
+            <a:r>
+              <a:rPr lang="en-US" sz="1400"/>
+              <a:t>Set up Cloud Voicemail - Microsoft Teams | Microsoft Learn — learn — https://learn.microsoft.com/en-us/microsoftteams/set-up-phone-system-voicemail — last checked 2026-10</a:t>
+            </a:r>
+          </a:p>
+          <a:p>
+            <a:r>
+              <a:rPr lang="en-US" sz="1400"/>
+              <a:t>Teams Phone licensing — learn — https://learn.microsoft.com/en-us/microsoftteams/teams-phone-licensing — last checked 2026-10</a:t>
+            </a:r>
+          </a:p>
+          <a:p>
+            <a:r>
+              <a:rPr lang="en-US" sz="1400"/>
+              <a:t>Teams add-on licensing — learn — https://learn.microsoft.com/en-us/microsoftteams/teams-add-on-licensing/microsoft-teams-add-on-licensing — last checked 2026-10</a:t>
+            </a:r>
+          </a:p>
+        </p:txBody>
+      </p:sp>
+    </p:spTree>
+  </p:cSld>
+  <p:clrMapOvr>
+    <a:masterClrMapping/>
+  </p:clrMapOvr>
+</p:sld>
+</file>
+
+<file path=ppt/slides/slide21.xml><?xml version="1.0" encoding="utf-8"?>
+<p:sld xmlns:a="http://schemas.openxmlformats.org/drawingml/2006/main" xmlns:r="http://schemas.openxmlformats.org/officeDocument/2006/relationships" xmlns:p="http://schemas.openxmlformats.org/presentationml/2006/main">
+  <p:cSld>
+    <p:spTree>
+      <p:nvGrpSpPr>
+        <p:cNvPr id="1" name=""/>
+        <p:cNvGrpSpPr/>
+        <p:nvPr/>
+      </p:nvGrpSpPr>
+      <p:grpSpPr>
+        <a:xfrm>
+          <a:off x="0" y="0"/>
+          <a:ext cx="0" cy="0"/>
+          <a:chOff x="0" y="0"/>
+          <a:chExt cx="0" cy="0"/>
+        </a:xfrm>
+      </p:grpSpPr>
+      <p:sp>
+        <p:nvSpPr>
+          <p:cNvPr id="2" name="Title"/>
+          <p:cNvSpPr/>
+          <p:nvPr/>
+        </p:nvSpPr>
+        <p:spPr>
+          <a:xfrm>
+            <a:off x="400000" y="240000"/>
+            <a:ext cx="8400000" cy="700000"/>
+          </a:xfrm>
+        </p:spPr>
+        <p:txBody>
+          <a:bodyPr/>
+          <a:lstStyle/>
+          <a:p>
+            <a:r>
+              <a:rPr lang="en-US" sz="2800"/>
+              <a:t>Sources and go deeper</a:t>
+            </a:r>
+          </a:p>
+        </p:txBody>
+      </p:sp>
+      <p:sp>
+        <p:nvSpPr>
+          <p:cNvPr id="3" name="Body"/>
+          <p:cNvSpPr/>
+          <p:nvPr/>
+        </p:nvSpPr>
+        <p:spPr>
+          <a:xfrm>
+            <a:off x="400000" y="1000000"/>
+            <a:ext cx="8400000" cy="3800000"/>
+          </a:xfrm>
+        </p:spPr>
+        <p:txBody>
+          <a:bodyPr/>
+          <a:lstStyle/>
+          <a:p>
+            <a:r>
+              <a:rPr lang="en-US" sz="1400"/>
+              <a:t>Teams Phone Resource Account licenses — learn — https://learn.microsoft.com/en-us/microsoftteams/teams-add-on-licensing/virtual-user — last checked 2026-10</a:t>
+            </a:r>
+          </a:p>
+          <a:p>
+            <a:r>
+              <a:rPr lang="en-US" sz="1400"/>
+              <a:t>Calling Plans — learn — https://learn.microsoft.com/en-us/microsoftteams/calling-plans-for-office-365 — last checked 2026-10</a:t>
+            </a:r>
+          </a:p>
+          <a:p>
+            <a:r>
+              <a:rPr lang="en-US" sz="1400"/>
+              <a:t>PSTN connectivity options — learn — https://learn.microsoft.com/en-us/microsoftteams/pstn-connectivity — last checked 2026-10</a:t>
+            </a:r>
+          </a:p>
+          <a:p>
+            <a:r>
+              <a:rPr lang="en-US" sz="1400"/>
+              <a:t>Voice app prerequisites and licensing — learn — https://learn.microsoft.com/en-us/microsoftteams/aa-cq-reference-prerequisites-licensing — last checked 2026-10</a:t>
+            </a:r>
+          </a:p>
+        </p:txBody>
+      </p:sp>
+    </p:spTree>
+  </p:cSld>
+  <p:clrMapOvr>
+    <a:masterClrMapping/>
+  </p:clrMapOvr>
+</p:sld>
+</file>
+
+<file path=ppt/slides/slide22.xml><?xml version="1.0" encoding="utf-8"?>
+<p:sld xmlns:a="http://schemas.openxmlformats.org/drawingml/2006/main" xmlns:r="http://schemas.openxmlformats.org/officeDocument/2006/relationships" xmlns:p="http://schemas.openxmlformats.org/presentationml/2006/main">
+  <p:cSld>
+    <p:spTree>
+      <p:nvGrpSpPr>
+        <p:cNvPr id="1" name=""/>
+        <p:cNvGrpSpPr/>
+        <p:nvPr/>
+      </p:nvGrpSpPr>
+      <p:grpSpPr>
+        <a:xfrm>
+          <a:off x="0" y="0"/>
+          <a:ext cx="0" cy="0"/>
+          <a:chOff x="0" y="0"/>
+          <a:chExt cx="0" cy="0"/>
+        </a:xfrm>
+      </p:grpSpPr>
+      <p:sp>
+        <p:nvSpPr>
+          <p:cNvPr id="2" name="Title"/>
+          <p:cNvSpPr/>
+          <p:nvPr/>
+        </p:nvSpPr>
+        <p:spPr>
+          <a:xfrm>
+            <a:off x="400000" y="240000"/>
+            <a:ext cx="8400000" cy="700000"/>
+          </a:xfrm>
+        </p:spPr>
+        <p:txBody>
+          <a:bodyPr/>
+          <a:lstStyle/>
+          <a:p>
+            <a:r>
+              <a:rPr lang="en-US" sz="2800"/>
+              <a:t>Sources and go deeper</a:t>
+            </a:r>
+          </a:p>
+        </p:txBody>
+      </p:sp>
+      <p:sp>
+        <p:nvSpPr>
+          <p:cNvPr id="3" name="Body"/>
+          <p:cNvSpPr/>
+          <p:nvPr/>
+        </p:nvSpPr>
+        <p:spPr>
+          <a:xfrm>
+            <a:off x="400000" y="1000000"/>
+            <a:ext cx="8400000" cy="3800000"/>
+          </a:xfrm>
+        </p:spPr>
+        <p:txBody>
+          <a:bodyPr/>
+          <a:lstStyle/>
+          <a:p>
+            <a:r>
+              <a:rPr lang="en-US" sz="1400"/>
+              <a:t>PowerShell — wikipedia — https://en.wikipedia.org/wiki/PowerShell — last checked 2026-10</a:t>
+            </a:r>
+          </a:p>
+          <a:p>
+            <a:r>
+              <a:rPr lang="en-US" sz="1400"/>
+              <a:t>Manage voice routing policies — learn — https://learn.microsoft.com/en-us/microsoftteams/manage-voice-routing-policies — last checked 2026-10</a:t>
+            </a:r>
+          </a:p>
+          <a:p>
+            <a:r>
+              <a:rPr lang="en-US" sz="1400"/>
+              <a:t>New-CsTeamsComplianceRecordingPolicy — learn — https://learn.microsoft.com/en-us/powershell/module/teams/new-csteamscompliancerecordingpolicy?view=teams-ps — last checked 2026-10</a:t>
+            </a:r>
+          </a:p>
+          <a:p>
+            <a:r>
+              <a:rPr lang="en-US" sz="1400"/>
+              <a:t>Create and manage dial plans — learn — https://learn.microsoft.com/en-us/microsoftteams/create-and-manage-dial-plans — last checked 2026-10</a:t>
+            </a:r>
+          </a:p>
+        </p:txBody>
+      </p:sp>
+    </p:spTree>
+  </p:cSld>
+  <p:clrMapOvr>
+    <a:masterClrMapping/>
+  </p:clrMapOvr>
+</p:sld>
+</file>
+
+<file path=ppt/slides/slide23.xml><?xml version="1.0" encoding="utf-8"?>
+<p:sld xmlns:a="http://schemas.openxmlformats.org/drawingml/2006/main" xmlns:r="http://schemas.openxmlformats.org/officeDocument/2006/relationships" xmlns:p="http://schemas.openxmlformats.org/presentationml/2006/main">
+  <p:cSld>
+    <p:spTree>
+      <p:nvGrpSpPr>
+        <p:cNvPr id="1" name=""/>
+        <p:cNvGrpSpPr/>
+        <p:nvPr/>
+      </p:nvGrpSpPr>
+      <p:grpSpPr>
+        <a:xfrm>
+          <a:off x="0" y="0"/>
+          <a:ext cx="0" cy="0"/>
+          <a:chOff x="0" y="0"/>
+          <a:chExt cx="0" cy="0"/>
+        </a:xfrm>
+      </p:grpSpPr>
+      <p:sp>
+        <p:nvSpPr>
+          <p:cNvPr id="2" name="Title"/>
+          <p:cNvSpPr/>
+          <p:nvPr/>
+        </p:nvSpPr>
+        <p:spPr>
+          <a:xfrm>
+            <a:off x="400000" y="240000"/>
+            <a:ext cx="8400000" cy="700000"/>
+          </a:xfrm>
+        </p:spPr>
+        <p:txBody>
+          <a:bodyPr/>
+          <a:lstStyle/>
+          <a:p>
+            <a:r>
+              <a:rPr lang="en-US" sz="2800"/>
+              <a:t>Sources and go deeper</a:t>
+            </a:r>
+          </a:p>
+        </p:txBody>
+      </p:sp>
+      <p:sp>
+        <p:nvSpPr>
+          <p:cNvPr id="3" name="Body"/>
+          <p:cNvSpPr/>
+          <p:nvPr/>
+        </p:nvSpPr>
+        <p:spPr>
+          <a:xfrm>
+            <a:off x="400000" y="1000000"/>
+            <a:ext cx="8400000" cy="3800000"/>
+          </a:xfrm>
+        </p:spPr>
+        <p:txBody>
+          <a:bodyPr/>
+          <a:lstStyle/>
+          <a:p>
+            <a:r>
+              <a:rPr lang="en-US" sz="1400"/>
+              <a:t>QoS in Microsoft Teams — learn — https://learn.microsoft.com/en-us/microsoftteams/qos-in-teams — last checked 2026-10</a:t>
+            </a:r>
+          </a:p>
+          <a:p>
+            <a:r>
+              <a:rPr lang="en-US" sz="1400"/>
+              <a:t>RFC 3550 — rfc — https://www.rfc-editor.org/rfc/rfc3550 — last checked 2026-10</a:t>
+            </a:r>
+          </a:p>
+          <a:p>
+            <a:r>
+              <a:rPr lang="en-US" sz="1400"/>
+              <a:t>Quality of service — wikipedia — https://en.wikipedia.org/wiki/Quality_of_service — last checked 2026-10</a:t>
+            </a:r>
+          </a:p>
+          <a:p>
+            <a:r>
+              <a:rPr lang="en-US" sz="1400"/>
+              <a:t>Prepare the network for Teams — learn — https://learn.microsoft.com/en-us/microsoftteams/prepare-network — last checked 2026-10</a:t>
+            </a:r>
+          </a:p>
+        </p:txBody>
+      </p:sp>
+    </p:spTree>
+  </p:cSld>
+  <p:clrMapOvr>
+    <a:masterClrMapping/>
+  </p:clrMapOvr>
+</p:sld>
+</file>
+
+<file path=ppt/slides/slide24.xml><?xml version="1.0" encoding="utf-8"?>
+<p:sld xmlns:a="http://schemas.openxmlformats.org/drawingml/2006/main" xmlns:r="http://schemas.openxmlformats.org/officeDocument/2006/relationships" xmlns:p="http://schemas.openxmlformats.org/presentationml/2006/main">
+  <p:cSld>
+    <p:spTree>
+      <p:nvGrpSpPr>
+        <p:cNvPr id="1" name=""/>
+        <p:cNvGrpSpPr/>
+        <p:nvPr/>
+      </p:nvGrpSpPr>
+      <p:grpSpPr>
+        <a:xfrm>
+          <a:off x="0" y="0"/>
+          <a:ext cx="0" cy="0"/>
+          <a:chOff x="0" y="0"/>
+          <a:chExt cx="0" cy="0"/>
+        </a:xfrm>
+      </p:grpSpPr>
+      <p:sp>
+        <p:nvSpPr>
+          <p:cNvPr id="2" name="Title"/>
+          <p:cNvSpPr/>
+          <p:nvPr/>
+        </p:nvSpPr>
+        <p:spPr>
+          <a:xfrm>
+            <a:off x="400000" y="240000"/>
+            <a:ext cx="8400000" cy="700000"/>
+          </a:xfrm>
+        </p:spPr>
+        <p:txBody>
+          <a:bodyPr/>
+          <a:lstStyle/>
+          <a:p>
+            <a:r>
+              <a:rPr lang="en-US" sz="2800"/>
+              <a:t>Sources and go deeper</a:t>
+            </a:r>
+          </a:p>
+        </p:txBody>
+      </p:sp>
+      <p:sp>
+        <p:nvSpPr>
+          <p:cNvPr id="3" name="Body"/>
+          <p:cNvSpPr/>
+          <p:nvPr/>
+        </p:nvSpPr>
+        <p:spPr>
+          <a:xfrm>
+            <a:off x="400000" y="1000000"/>
+            <a:ext cx="8400000" cy="3800000"/>
+          </a:xfrm>
+        </p:spPr>
+        <p:txBody>
+          <a:bodyPr/>
+          <a:lstStyle/>
+          <a:p>
+            <a:r>
+              <a:rPr lang="en-US" sz="1400"/>
+              <a:t>Emergency locations, addresses, and routing — learn — https://learn.microsoft.com/en-us/microsoftteams/what-are-emergency-locations-addresses-and-call-routing — last checked 2026-10</a:t>
+            </a:r>
+          </a:p>
+          <a:p>
+            <a:r>
+              <a:rPr lang="en-US" sz="1400"/>
+              <a:t>RFC 3261 — rfc — https://www.rfc-editor.org/rfc/rfc3261 — last checked 2026-10</a:t>
+            </a:r>
+          </a:p>
+          <a:p>
+            <a:r>
+              <a:rPr lang="en-US" sz="1400"/>
+              <a:t>Public switched telephone network — wikipedia — https://en.wikipedia.org/wiki/Public_switched_telephone_network — last checked 2026-10</a:t>
+            </a:r>
+          </a:p>
+          <a:p>
+            <a:r>
+              <a:rPr lang="en-US" sz="1400"/>
+              <a:t>Session Initiation Protocol — wikipedia — https://en.wikipedia.org/wiki/Session_Initiation_Protocol — last checked 2026-10</a:t>
+            </a:r>
+          </a:p>
+        </p:txBody>
+      </p:sp>
+    </p:spTree>
+  </p:cSld>
+  <p:clrMapOvr>
+    <a:masterClrMapping/>
+  </p:clrMapOvr>
+</p:sld>
+</file>
+
+<file path=ppt/slides/slide25.xml><?xml version="1.0" encoding="utf-8"?>
+<p:sld xmlns:a="http://schemas.openxmlformats.org/drawingml/2006/main" xmlns:r="http://schemas.openxmlformats.org/officeDocument/2006/relationships" xmlns:p="http://schemas.openxmlformats.org/presentationml/2006/main">
+  <p:cSld>
+    <p:spTree>
+      <p:nvGrpSpPr>
+        <p:cNvPr id="1" name=""/>
+        <p:cNvGrpSpPr/>
+        <p:nvPr/>
+      </p:nvGrpSpPr>
+      <p:grpSpPr>
+        <a:xfrm>
+          <a:off x="0" y="0"/>
+          <a:ext cx="0" cy="0"/>
+          <a:chOff x="0" y="0"/>
+          <a:chExt cx="0" cy="0"/>
+        </a:xfrm>
+      </p:grpSpPr>
+      <p:sp>
+        <p:nvSpPr>
+          <p:cNvPr id="2" name="Title"/>
+          <p:cNvSpPr/>
+          <p:nvPr/>
+        </p:nvSpPr>
+        <p:spPr>
+          <a:xfrm>
+            <a:off x="400000" y="240000"/>
+            <a:ext cx="8400000" cy="700000"/>
+          </a:xfrm>
+        </p:spPr>
+        <p:txBody>
+          <a:bodyPr/>
+          <a:lstStyle/>
+          <a:p>
+            <a:r>
+              <a:rPr lang="en-US" sz="2800"/>
+              <a:t>Sources and go deeper</a:t>
+            </a:r>
+          </a:p>
+        </p:txBody>
+      </p:sp>
+      <p:sp>
+        <p:nvSpPr>
+          <p:cNvPr id="3" name="Body"/>
+          <p:cNvSpPr/>
+          <p:nvPr/>
+        </p:nvSpPr>
+        <p:spPr>
+          <a:xfrm>
+            <a:off x="400000" y="1000000"/>
+            <a:ext cx="8400000" cy="3800000"/>
+          </a:xfrm>
+        </p:spPr>
+        <p:txBody>
+          <a:bodyPr/>
+          <a:lstStyle/>
+          <a:p>
+            <a:r>
+              <a:rPr lang="en-US" sz="1400"/>
+              <a:t>Certified SBCs for Direct Routing — learn — https://learn.microsoft.com/en-us/microsoftteams/direct-routing-border-controllers — last checked 2026-10</a:t>
+            </a:r>
+          </a:p>
+          <a:p>
+            <a:r>
+              <a:rPr lang="en-US" sz="1400"/>
+              <a:t>Plan Teams Phone Mobile — confirm — https://learn.microsoft.com/en-us/microsoftteams/teams-phone-mobile-plan — last checked 2026-10. Did not open when checked.</a:t>
+            </a:r>
+          </a:p>
+          <a:p>
+            <a:r>
+              <a:rPr lang="en-US" sz="1400"/>
+              <a:t>Plan for Teams Phone Mobile - Microsoft Teams | Microsoft Learn — learn — https://learn.microsoft.com/en-us/microsoftteams/operator-connect-mobile-plan — last checked 2026-10</a:t>
+            </a:r>
+          </a:p>
+          <a:p>
+            <a:r>
+              <a:rPr lang="en-US" sz="1400"/>
+              <a:t>Plan Operator Connect — learn — https://learn.microsoft.com/en-us/microsoftteams/operator-connect-plan — last checked 2026-10</a:t>
+            </a:r>
+          </a:p>
+        </p:txBody>
+      </p:sp>
+    </p:spTree>
+  </p:cSld>
+  <p:clrMapOvr>
+    <a:masterClrMapping/>
+  </p:clrMapOvr>
+</p:sld>
+</file>
+
+<file path=ppt/slides/slide26.xml><?xml version="1.0" encoding="utf-8"?>
+<p:sld xmlns:a="http://schemas.openxmlformats.org/drawingml/2006/main" xmlns:r="http://schemas.openxmlformats.org/officeDocument/2006/relationships" xmlns:p="http://schemas.openxmlformats.org/presentationml/2006/main">
+  <p:cSld>
+    <p:spTree>
+      <p:nvGrpSpPr>
+        <p:cNvPr id="1" name=""/>
+        <p:cNvGrpSpPr/>
+        <p:nvPr/>
+      </p:nvGrpSpPr>
+      <p:grpSpPr>
+        <a:xfrm>
+          <a:off x="0" y="0"/>
+          <a:ext cx="0" cy="0"/>
+          <a:chOff x="0" y="0"/>
+          <a:chExt cx="0" cy="0"/>
+        </a:xfrm>
+      </p:grpSpPr>
+      <p:sp>
+        <p:nvSpPr>
+          <p:cNvPr id="2" name="Title"/>
+          <p:cNvSpPr/>
+          <p:nvPr/>
+        </p:nvSpPr>
+        <p:spPr>
+          <a:xfrm>
+            <a:off x="400000" y="240000"/>
+            <a:ext cx="8400000" cy="700000"/>
+          </a:xfrm>
+        </p:spPr>
+        <p:txBody>
+          <a:bodyPr/>
+          <a:lstStyle/>
+          <a:p>
+            <a:r>
+              <a:rPr lang="en-US" sz="2800"/>
+              <a:t>Sources and go deeper</a:t>
+            </a:r>
+          </a:p>
+        </p:txBody>
+      </p:sp>
+      <p:sp>
+        <p:nvSpPr>
+          <p:cNvPr id="3" name="Body"/>
+          <p:cNvSpPr/>
+          <p:nvPr/>
+        </p:nvSpPr>
+        <p:spPr>
+          <a:xfrm>
+            <a:off x="400000" y="1000000"/>
+            <a:ext cx="8400000" cy="3800000"/>
+          </a:xfrm>
+        </p:spPr>
+        <p:txBody>
+          <a:bodyPr/>
+          <a:lstStyle/>
+          <a:p>
+            <a:r>
+              <a:rPr lang="en-US" sz="1400"/>
+              <a:t>RFC 3966 — rfc — https://www.rfc-editor.org/rfc/rfc3966 — last checked 2026-10</a:t>
+            </a:r>
+          </a:p>
+          <a:p>
+            <a:r>
+              <a:rPr lang="en-US" sz="1400"/>
+              <a:t>E.164 — wikipedia — https://en.wikipedia.org/wiki/E.164 — last checked 2026-10</a:t>
+            </a:r>
+          </a:p>
+          <a:p>
+            <a:r>
+              <a:rPr lang="en-US" sz="1400"/>
+              <a:t>Set up an auto attendant — learn — https://learn.microsoft.com/en-us/microsoftteams/create-a-phone-system-auto-attendant — last checked 2026-10</a:t>
+            </a:r>
+          </a:p>
+          <a:p>
+            <a:r>
+              <a:rPr lang="en-US" sz="1400"/>
+              <a:t>Automatic call distributor — wikipedia — https://en.wikipedia.org/wiki/Automatic_call_distributor — last checked 2026-10</a:t>
+            </a:r>
+          </a:p>
+        </p:txBody>
+      </p:sp>
+    </p:spTree>
+  </p:cSld>
+  <p:clrMapOvr>
+    <a:masterClrMapping/>
+  </p:clrMapOvr>
+</p:sld>
+</file>
+
+<file path=ppt/slides/slide27.xml><?xml version="1.0" encoding="utf-8"?>
+<p:sld xmlns:a="http://schemas.openxmlformats.org/drawingml/2006/main" xmlns:r="http://schemas.openxmlformats.org/officeDocument/2006/relationships" xmlns:p="http://schemas.openxmlformats.org/presentationml/2006/main">
+  <p:cSld>
+    <p:spTree>
+      <p:nvGrpSpPr>
+        <p:cNvPr id="1" name=""/>
+        <p:cNvGrpSpPr/>
+        <p:nvPr/>
+      </p:nvGrpSpPr>
+      <p:grpSpPr>
+        <a:xfrm>
+          <a:off x="0" y="0"/>
+          <a:ext cx="0" cy="0"/>
+          <a:chOff x="0" y="0"/>
+          <a:chExt cx="0" cy="0"/>
+        </a:xfrm>
+      </p:grpSpPr>
+      <p:sp>
+        <p:nvSpPr>
+          <p:cNvPr id="2" name="Title"/>
+          <p:cNvSpPr/>
+          <p:nvPr/>
+        </p:nvSpPr>
+        <p:spPr>
+          <a:xfrm>
+            <a:off x="400000" y="240000"/>
+            <a:ext cx="8400000" cy="700000"/>
+          </a:xfrm>
+        </p:spPr>
+        <p:txBody>
+          <a:bodyPr/>
+          <a:lstStyle/>
+          <a:p>
+            <a:r>
+              <a:rPr lang="en-US" sz="2800"/>
+              <a:t>Sources and go deeper</a:t>
+            </a:r>
+          </a:p>
+        </p:txBody>
+      </p:sp>
+      <p:sp>
+        <p:nvSpPr>
+          <p:cNvPr id="3" name="Body"/>
+          <p:cNvSpPr/>
+          <p:nvPr/>
+        </p:nvSpPr>
+        <p:spPr>
+          <a:xfrm>
+            <a:off x="400000" y="1000000"/>
+            <a:ext cx="8400000" cy="3800000"/>
+          </a:xfrm>
+        </p:spPr>
+        <p:txBody>
+          <a:bodyPr/>
+          <a:lstStyle/>
+          <a:p>
+            <a:r>
+              <a:rPr lang="en-US" sz="1400"/>
+              <a:t>Interactive voice response — wikipedia — https://en.wikipedia.org/wiki/Interactive_voice_response — last checked 2026-10</a:t>
+            </a:r>
+          </a:p>
+          <a:p>
+            <a:r>
+              <a:rPr lang="en-US" sz="1400"/>
+              <a:t>Set up a call queue — learn — https://learn.microsoft.com/en-us/microsoftteams/create-a-phone-system-call-queue — last checked 2026-10</a:t>
+            </a:r>
+          </a:p>
+          <a:p>
+            <a:r>
+              <a:rPr lang="en-US" sz="1400"/>
+              <a:t>Emergency telephone number — wikipedia — https://en.wikipedia.org/wiki/Emergency_telephone_number — last checked 2026-10</a:t>
+            </a:r>
+          </a:p>
+          <a:p>
+            <a:r>
+              <a:rPr lang="en-US" sz="1400"/>
+              <a:t>Location-based routing — learn — https://learn.microsoft.com/en-us/microsoftteams/location-based-routing-plan — last checked 2026-10</a:t>
+            </a:r>
+          </a:p>
+        </p:txBody>
+      </p:sp>
+    </p:spTree>
+  </p:cSld>
+  <p:clrMapOvr>
+    <a:masterClrMapping/>
+  </p:clrMapOvr>
+</p:sld>
+</file>
+
+<file path=ppt/slides/slide28.xml><?xml version="1.0" encoding="utf-8"?>
+<p:sld xmlns:a="http://schemas.openxmlformats.org/drawingml/2006/main" xmlns:r="http://schemas.openxmlformats.org/officeDocument/2006/relationships" xmlns:p="http://schemas.openxmlformats.org/presentationml/2006/main">
+  <p:cSld>
+    <p:spTree>
+      <p:nvGrpSpPr>
+        <p:cNvPr id="1" name=""/>
+        <p:cNvGrpSpPr/>
+        <p:nvPr/>
+      </p:nvGrpSpPr>
+      <p:grpSpPr>
+        <a:xfrm>
+          <a:off x="0" y="0"/>
+          <a:ext cx="0" cy="0"/>
+          <a:chOff x="0" y="0"/>
+          <a:chExt cx="0" cy="0"/>
+        </a:xfrm>
+      </p:grpSpPr>
+      <p:sp>
+        <p:nvSpPr>
+          <p:cNvPr id="2" name="Title"/>
+          <p:cNvSpPr/>
+          <p:nvPr/>
+        </p:nvSpPr>
+        <p:spPr>
+          <a:xfrm>
+            <a:off x="400000" y="240000"/>
+            <a:ext cx="8400000" cy="700000"/>
+          </a:xfrm>
+        </p:spPr>
+        <p:txBody>
+          <a:bodyPr/>
+          <a:lstStyle/>
+          <a:p>
+            <a:r>
+              <a:rPr lang="en-US" sz="2800"/>
+              <a:t>Sources and go deeper</a:t>
+            </a:r>
+          </a:p>
+        </p:txBody>
+      </p:sp>
+      <p:sp>
+        <p:nvSpPr>
+          <p:cNvPr id="3" name="Body"/>
+          <p:cNvSpPr/>
+          <p:nvPr/>
+        </p:nvSpPr>
+        <p:spPr>
+          <a:xfrm>
+            <a:off x="400000" y="1000000"/>
+            <a:ext cx="8400000" cy="3800000"/>
+          </a:xfrm>
+        </p:spPr>
+        <p:txBody>
+          <a:bodyPr/>
+          <a:lstStyle/>
+          <a:p>
+            <a:r>
+              <a:rPr lang="en-US" sz="1400"/>
+              <a:t>Survivable Branch Appliance — learn — https://learn.microsoft.com/en-us/microsoftteams/direct-routing-survivable-branch-appliance — last checked 2026-10</a:t>
+            </a:r>
+          </a:p>
+          <a:p>
+            <a:r>
+              <a:rPr lang="en-US" sz="1400"/>
+              <a:t>SIP Gateway — learn — https://learn.microsoft.com/en-us/microsoftteams/sip-gateway-plan — last checked 2026-10</a:t>
+            </a:r>
+          </a:p>
+          <a:p>
+            <a:r>
+              <a:rPr lang="en-US" sz="1400"/>
+              <a:t>RFC 3711 — rfc — https://www.rfc-editor.org/rfc/rfc3711 — last checked 2026-10</a:t>
+            </a:r>
+          </a:p>
+          <a:p>
+            <a:r>
+              <a:rPr lang="en-US" sz="1400"/>
+              <a:t>AudioCodes session border controllers — confirm — https://www.audiocodes.com/solutions-products/products/session-border-controllers — last checked 2026-10. Did not open when checked.</a:t>
+            </a:r>
+          </a:p>
+        </p:txBody>
+      </p:sp>
+    </p:spTree>
+  </p:cSld>
+  <p:clrMapOvr>
+    <a:masterClrMapping/>
+  </p:clrMapOvr>
+</p:sld>
+</file>
+
+<file path=ppt/slides/slide29.xml><?xml version="1.0" encoding="utf-8"?>
+<p:sld xmlns:a="http://schemas.openxmlformats.org/drawingml/2006/main" xmlns:r="http://schemas.openxmlformats.org/officeDocument/2006/relationships" xmlns:p="http://schemas.openxmlformats.org/presentationml/2006/main">
+  <p:cSld>
+    <p:spTree>
+      <p:nvGrpSpPr>
+        <p:cNvPr id="1" name=""/>
+        <p:cNvGrpSpPr/>
+        <p:nvPr/>
+      </p:nvGrpSpPr>
+      <p:grpSpPr>
+        <a:xfrm>
+          <a:off x="0" y="0"/>
+          <a:ext cx="0" cy="0"/>
+          <a:chOff x="0" y="0"/>
+          <a:chExt cx="0" cy="0"/>
+        </a:xfrm>
+      </p:grpSpPr>
+      <p:sp>
+        <p:nvSpPr>
+          <p:cNvPr id="2" name="Title"/>
+          <p:cNvSpPr/>
+          <p:nvPr/>
+        </p:nvSpPr>
+        <p:spPr>
+          <a:xfrm>
+            <a:off x="400000" y="240000"/>
+            <a:ext cx="8400000" cy="700000"/>
+          </a:xfrm>
+        </p:spPr>
+        <p:txBody>
+          <a:bodyPr/>
+          <a:lstStyle/>
+          <a:p>
+            <a:r>
+              <a:rPr lang="en-US" sz="2800"/>
+              <a:t>Sources and go deeper</a:t>
+            </a:r>
+          </a:p>
+        </p:txBody>
+      </p:sp>
+      <p:sp>
+        <p:nvSpPr>
+          <p:cNvPr id="3" name="Body"/>
+          <p:cNvSpPr/>
+          <p:nvPr/>
+        </p:nvSpPr>
+        <p:spPr>
+          <a:xfrm>
+            <a:off x="400000" y="1000000"/>
+            <a:ext cx="8400000" cy="3800000"/>
+          </a:xfrm>
+        </p:spPr>
+        <p:txBody>
+          <a:bodyPr/>
+          <a:lstStyle/>
+          <a:p>
+            <a:r>
+              <a:rPr lang="en-US" sz="1400"/>
+              <a:t>Session Border Controllers (SBCs) | | AudioCodes — vendor — https://www.audiocodes.com/products/session-border-controllers-sbcs — last checked 2026-10</a:t>
+            </a:r>
+          </a:p>
+          <a:p>
+            <a:r>
+              <a:rPr lang="en-US" sz="1400"/>
+              <a:t>Session border controller — wikipedia — https://en.wikipedia.org/wiki/Session_border_controller — last checked 2026-10</a:t>
+            </a:r>
+          </a:p>
+          <a:p>
+            <a:r>
+              <a:rPr lang="en-US" sz="1400"/>
+              <a:t>Cisco Unified Border Element — vendor — https://www.cisco.com/c/en/us/products/unified-communications/unified-border-element/index.html — last checked 2026-10</a:t>
+            </a:r>
+          </a:p>
+          <a:p>
+            <a:r>
+              <a:rPr lang="en-US" sz="1400"/>
+              <a:t>Oracle Session Border Controller — confirm — https://www.oracle.com/communications/session-border-controller/ — last checked 2026-10. Did not open when checked.</a:t>
             </a:r>
           </a:p>
         </p:txBody>
@@ -759,16 +1906,16 @@
         </p:nvSpPr>
         <p:spPr>
           <a:xfrm>
-            <a:off x="400000" y="300000"/>
-            <a:ext cx="8000000" cy="800000"/>
-          </a:xfrm>
-        </p:spPr>
-        <p:txBody>
-          <a:bodyPr/>
-          <a:lstStyle/>
-          <a:p>
-            <a:r>
-              <a:rPr lang="en-US" sz="3200"/>
+            <a:off x="400000" y="240000"/>
+            <a:ext cx="8400000" cy="700000"/>
+          </a:xfrm>
+        </p:spPr>
+        <p:txBody>
+          <a:bodyPr/>
+          <a:lstStyle/>
+          <a:p>
+            <a:r>
+              <a:rPr lang="en-US" sz="2800"/>
               <a:t>PowerShell and admin</a:t>
             </a:r>
           </a:p>
@@ -782,17 +1929,640 @@
         </p:nvSpPr>
         <p:spPr>
           <a:xfrm>
-            <a:off x="400000" y="1400000"/>
-            <a:ext cx="8000000" cy="3000000"/>
-          </a:xfrm>
-        </p:spPr>
-        <p:txBody>
-          <a:bodyPr/>
-          <a:lstStyle/>
-          <a:p>
-            <a:r>
-              <a:rPr lang="en-US" sz="1800"/>
-              <a:t>The portal hides order. The shell shows the object you actually changed, and it is how compliance recording is assigned. Confirm before relying. Independent free learning-only project.</a:t>
+            <a:off x="400000" y="1000000"/>
+            <a:ext cx="8400000" cy="3800000"/>
+          </a:xfrm>
+        </p:spPr>
+        <p:txBody>
+          <a:bodyPr/>
+          <a:lstStyle/>
+          <a:p>
+            <a:r>
+              <a:rPr lang="en-US" sz="1400"/>
+              <a:t>The portal hides order. The shell shows the object you actually changed, and it is how compliance recording is assigned. Confirm before relying.</a:t>
+            </a:r>
+          </a:p>
+          <a:p>
+            <a:r>
+              <a:rPr lang="en-US" sz="1400"/>
+              <a:t>Independent free learning-only project.</a:t>
+            </a:r>
+          </a:p>
+        </p:txBody>
+      </p:sp>
+    </p:spTree>
+  </p:cSld>
+  <p:clrMapOvr>
+    <a:masterClrMapping/>
+  </p:clrMapOvr>
+</p:sld>
+</file>
+
+<file path=ppt/slides/slide30.xml><?xml version="1.0" encoding="utf-8"?>
+<p:sld xmlns:a="http://schemas.openxmlformats.org/drawingml/2006/main" xmlns:r="http://schemas.openxmlformats.org/officeDocument/2006/relationships" xmlns:p="http://schemas.openxmlformats.org/presentationml/2006/main">
+  <p:cSld>
+    <p:spTree>
+      <p:nvGrpSpPr>
+        <p:cNvPr id="1" name=""/>
+        <p:cNvGrpSpPr/>
+        <p:nvPr/>
+      </p:nvGrpSpPr>
+      <p:grpSpPr>
+        <a:xfrm>
+          <a:off x="0" y="0"/>
+          <a:ext cx="0" cy="0"/>
+          <a:chOff x="0" y="0"/>
+          <a:chExt cx="0" cy="0"/>
+        </a:xfrm>
+      </p:grpSpPr>
+      <p:sp>
+        <p:nvSpPr>
+          <p:cNvPr id="2" name="Title"/>
+          <p:cNvSpPr/>
+          <p:nvPr/>
+        </p:nvSpPr>
+        <p:spPr>
+          <a:xfrm>
+            <a:off x="400000" y="240000"/>
+            <a:ext cx="8400000" cy="700000"/>
+          </a:xfrm>
+        </p:spPr>
+        <p:txBody>
+          <a:bodyPr/>
+          <a:lstStyle/>
+          <a:p>
+            <a:r>
+              <a:rPr lang="en-US" sz="2800"/>
+              <a:t>Sources and go deeper</a:t>
+            </a:r>
+          </a:p>
+        </p:txBody>
+      </p:sp>
+      <p:sp>
+        <p:nvSpPr>
+          <p:cNvPr id="3" name="Body"/>
+          <p:cNvSpPr/>
+          <p:nvPr/>
+        </p:nvSpPr>
+        <p:spPr>
+          <a:xfrm>
+            <a:off x="400000" y="1000000"/>
+            <a:ext cx="8400000" cy="3800000"/>
+          </a:xfrm>
+        </p:spPr>
+        <p:txBody>
+          <a:bodyPr/>
+          <a:lstStyle/>
+          <a:p>
+            <a:r>
+              <a:rPr lang="en-US" sz="1400"/>
+              <a:t>Session Border Controller Documentation - Home — docs — https://docs.oracle.com/en/industries/communications/session-border-controller/index.html — last checked 2026-10</a:t>
+            </a:r>
+          </a:p>
+          <a:p>
+            <a:r>
+              <a:rPr lang="en-US" sz="1400"/>
+              <a:t>Ribbon Communications — vendor — https://ribboncommunications.com/ — last checked 2026-10</a:t>
+            </a:r>
+          </a:p>
+          <a:p>
+            <a:r>
+              <a:rPr lang="en-US" sz="1400"/>
+              <a:t>RFC 8446 — rfc — https://www.rfc-editor.org/rfc/rfc8446 — last checked 2026-10</a:t>
+            </a:r>
+          </a:p>
+          <a:p>
+            <a:r>
+              <a:rPr lang="en-US" sz="1400"/>
+              <a:t>RFC 4566 — rfc — https://www.rfc-editor.org/rfc/rfc4566 — last checked 2026-10</a:t>
+            </a:r>
+          </a:p>
+        </p:txBody>
+      </p:sp>
+    </p:spTree>
+  </p:cSld>
+  <p:clrMapOvr>
+    <a:masterClrMapping/>
+  </p:clrMapOvr>
+</p:sld>
+</file>
+
+<file path=ppt/slides/slide31.xml><?xml version="1.0" encoding="utf-8"?>
+<p:sld xmlns:a="http://schemas.openxmlformats.org/drawingml/2006/main" xmlns:r="http://schemas.openxmlformats.org/officeDocument/2006/relationships" xmlns:p="http://schemas.openxmlformats.org/presentationml/2006/main">
+  <p:cSld>
+    <p:spTree>
+      <p:nvGrpSpPr>
+        <p:cNvPr id="1" name=""/>
+        <p:cNvGrpSpPr/>
+        <p:nvPr/>
+      </p:nvGrpSpPr>
+      <p:grpSpPr>
+        <a:xfrm>
+          <a:off x="0" y="0"/>
+          <a:ext cx="0" cy="0"/>
+          <a:chOff x="0" y="0"/>
+          <a:chExt cx="0" cy="0"/>
+        </a:xfrm>
+      </p:grpSpPr>
+      <p:sp>
+        <p:nvSpPr>
+          <p:cNvPr id="2" name="Title"/>
+          <p:cNvSpPr/>
+          <p:nvPr/>
+        </p:nvSpPr>
+        <p:spPr>
+          <a:xfrm>
+            <a:off x="400000" y="240000"/>
+            <a:ext cx="8400000" cy="700000"/>
+          </a:xfrm>
+        </p:spPr>
+        <p:txBody>
+          <a:bodyPr/>
+          <a:lstStyle/>
+          <a:p>
+            <a:r>
+              <a:rPr lang="en-US" sz="2800"/>
+              <a:t>Sources and go deeper</a:t>
+            </a:r>
+          </a:p>
+        </p:txBody>
+      </p:sp>
+      <p:sp>
+        <p:nvSpPr>
+          <p:cNvPr id="3" name="Body"/>
+          <p:cNvSpPr/>
+          <p:nvPr/>
+        </p:nvSpPr>
+        <p:spPr>
+          <a:xfrm>
+            <a:off x="400000" y="1000000"/>
+            <a:ext cx="8400000" cy="3800000"/>
+          </a:xfrm>
+        </p:spPr>
+        <p:txBody>
+          <a:bodyPr/>
+          <a:lstStyle/>
+          <a:p>
+            <a:r>
+              <a:rPr lang="en-US" sz="1400"/>
+              <a:t>Transport Layer Security — wikipedia — https://en.wikipedia.org/wiki/Transport_Layer_Security — last checked 2026-10</a:t>
+            </a:r>
+          </a:p>
+          <a:p>
+            <a:r>
+              <a:rPr lang="en-US" sz="1400"/>
+              <a:t>Use Call Analytics — learn — https://learn.microsoft.com/en-us/microsoftteams/use-call-analytics-to-troubleshoot-poor-call-quality — last checked 2026-10</a:t>
+            </a:r>
+          </a:p>
+          <a:p>
+            <a:r>
+              <a:rPr lang="en-US" sz="1400"/>
+              <a:t>What is Call Quality Dashboard — learn — https://learn.microsoft.com/en-us/microsoftteams/cqd-what-is-call-quality-dashboard — last checked 2026-10</a:t>
+            </a:r>
+          </a:p>
+          <a:p>
+            <a:r>
+              <a:rPr lang="en-US" sz="1400"/>
+              <a:t>Study guide AB-250 — learn — https://learn.microsoft.com/en-us/credentials/certifications/resources/study-guides/ab-250 — last checked 2026-10</a:t>
+            </a:r>
+          </a:p>
+        </p:txBody>
+      </p:sp>
+    </p:spTree>
+  </p:cSld>
+  <p:clrMapOvr>
+    <a:masterClrMapping/>
+  </p:clrMapOvr>
+</p:sld>
+</file>
+
+<file path=ppt/slides/slide32.xml><?xml version="1.0" encoding="utf-8"?>
+<p:sld xmlns:a="http://schemas.openxmlformats.org/drawingml/2006/main" xmlns:r="http://schemas.openxmlformats.org/officeDocument/2006/relationships" xmlns:p="http://schemas.openxmlformats.org/presentationml/2006/main">
+  <p:cSld>
+    <p:spTree>
+      <p:nvGrpSpPr>
+        <p:cNvPr id="1" name=""/>
+        <p:cNvGrpSpPr/>
+        <p:nvPr/>
+      </p:nvGrpSpPr>
+      <p:grpSpPr>
+        <a:xfrm>
+          <a:off x="0" y="0"/>
+          <a:ext cx="0" cy="0"/>
+          <a:chOff x="0" y="0"/>
+          <a:chExt cx="0" cy="0"/>
+        </a:xfrm>
+      </p:grpSpPr>
+      <p:sp>
+        <p:nvSpPr>
+          <p:cNvPr id="2" name="Title"/>
+          <p:cNvSpPr/>
+          <p:nvPr/>
+        </p:nvSpPr>
+        <p:spPr>
+          <a:xfrm>
+            <a:off x="400000" y="240000"/>
+            <a:ext cx="8400000" cy="700000"/>
+          </a:xfrm>
+        </p:spPr>
+        <p:txBody>
+          <a:bodyPr/>
+          <a:lstStyle/>
+          <a:p>
+            <a:r>
+              <a:rPr lang="en-US" sz="2800"/>
+              <a:t>Sources and go deeper</a:t>
+            </a:r>
+          </a:p>
+        </p:txBody>
+      </p:sp>
+      <p:sp>
+        <p:nvSpPr>
+          <p:cNvPr id="3" name="Body"/>
+          <p:cNvSpPr/>
+          <p:nvPr/>
+        </p:nvSpPr>
+        <p:spPr>
+          <a:xfrm>
+            <a:off x="400000" y="1000000"/>
+            <a:ext cx="8400000" cy="3800000"/>
+          </a:xfrm>
+        </p:spPr>
+        <p:txBody>
+          <a:bodyPr/>
+          <a:lstStyle/>
+          <a:p>
+            <a:r>
+              <a:rPr lang="en-US" sz="1400"/>
+              <a:t>Dynamics 365 Contact Center — learn — https://learn.microsoft.com/en-us/dynamics365/contact-center/ — last checked 2026-10</a:t>
+            </a:r>
+          </a:p>
+          <a:p>
+            <a:r>
+              <a:rPr lang="en-US" sz="1400"/>
+              <a:t>Call centre — wikipedia — https://en.wikipedia.org/wiki/Call_centre — last checked 2026-10</a:t>
+            </a:r>
+          </a:p>
+          <a:p>
+            <a:r>
+              <a:rPr lang="en-US" sz="1400"/>
+              <a:t>Dynamics 365 Contact Center AI Engineer Associate — learn — https://learn.microsoft.com/en-us/credentials/certifications/d365-contact-center-ai-engineer-associate/ — last checked 2026-10</a:t>
+            </a:r>
+          </a:p>
+          <a:p>
+            <a:r>
+              <a:rPr lang="en-US" sz="1400"/>
+              <a:t>AB-250 certification announcement — community — https://techcommunity.microsoft.com/blog/skills-hub-blog/new-microsoft-certified-dynamics-365-contact-center-ai-engineer-associate-certif/4494119 — last checked 2026-10</a:t>
+            </a:r>
+          </a:p>
+        </p:txBody>
+      </p:sp>
+    </p:spTree>
+  </p:cSld>
+  <p:clrMapOvr>
+    <a:masterClrMapping/>
+  </p:clrMapOvr>
+</p:sld>
+</file>
+
+<file path=ppt/slides/slide33.xml><?xml version="1.0" encoding="utf-8"?>
+<p:sld xmlns:a="http://schemas.openxmlformats.org/drawingml/2006/main" xmlns:r="http://schemas.openxmlformats.org/officeDocument/2006/relationships" xmlns:p="http://schemas.openxmlformats.org/presentationml/2006/main">
+  <p:cSld>
+    <p:spTree>
+      <p:nvGrpSpPr>
+        <p:cNvPr id="1" name=""/>
+        <p:cNvGrpSpPr/>
+        <p:nvPr/>
+      </p:nvGrpSpPr>
+      <p:grpSpPr>
+        <a:xfrm>
+          <a:off x="0" y="0"/>
+          <a:ext cx="0" cy="0"/>
+          <a:chOff x="0" y="0"/>
+          <a:chExt cx="0" cy="0"/>
+        </a:xfrm>
+      </p:grpSpPr>
+      <p:sp>
+        <p:nvSpPr>
+          <p:cNvPr id="2" name="Title"/>
+          <p:cNvSpPr/>
+          <p:nvPr/>
+        </p:nvSpPr>
+        <p:spPr>
+          <a:xfrm>
+            <a:off x="400000" y="240000"/>
+            <a:ext cx="8400000" cy="700000"/>
+          </a:xfrm>
+        </p:spPr>
+        <p:txBody>
+          <a:bodyPr/>
+          <a:lstStyle/>
+          <a:p>
+            <a:r>
+              <a:rPr lang="en-US" sz="2800"/>
+              <a:t>Sources and go deeper</a:t>
+            </a:r>
+          </a:p>
+        </p:txBody>
+      </p:sp>
+      <p:sp>
+        <p:nvSpPr>
+          <p:cNvPr id="3" name="Body"/>
+          <p:cNvSpPr/>
+          <p:nvPr/>
+        </p:nvSpPr>
+        <p:spPr>
+          <a:xfrm>
+            <a:off x="400000" y="1000000"/>
+            <a:ext cx="8400000" cy="3800000"/>
+          </a:xfrm>
+        </p:spPr>
+        <p:txBody>
+          <a:bodyPr/>
+          <a:lstStyle/>
+          <a:p>
+            <a:r>
+              <a:rPr lang="en-US" sz="1400"/>
+              <a:t>Azure Communication Services Call Automation — learn — https://learn.microsoft.com/en-us/azure/communication-services/concepts/call-automation/call-automation — last checked 2026-10</a:t>
+            </a:r>
+          </a:p>
+          <a:p>
+            <a:r>
+              <a:rPr lang="en-US" sz="1400"/>
+              <a:t>Teams Phone extensibility — learn — https://learn.microsoft.com/en-us/azure/communication-services/concepts/interop/tpe/teams-phone-extensibility-overview — last checked 2026-10</a:t>
+            </a:r>
+          </a:p>
+          <a:p>
+            <a:r>
+              <a:rPr lang="en-US" sz="1400"/>
+              <a:t>Teams Phone extensibility announcement — community — https://techcommunity.microsoft.com/blog/microsoftteamsblog/streamline-your-contact-center-telephony-with-teams-phone-extensibility/4450515 — last checked 2026-10</a:t>
+            </a:r>
+          </a:p>
+          <a:p>
+            <a:r>
+              <a:rPr lang="en-US" sz="1400"/>
+              <a:t>Retired certification exams — learn — https://learn.microsoft.com/en-us/credentials/support/retired-certification-exams — last checked 2026-10</a:t>
+            </a:r>
+          </a:p>
+        </p:txBody>
+      </p:sp>
+    </p:spTree>
+  </p:cSld>
+  <p:clrMapOvr>
+    <a:masterClrMapping/>
+  </p:clrMapOvr>
+</p:sld>
+</file>
+
+<file path=ppt/slides/slide34.xml><?xml version="1.0" encoding="utf-8"?>
+<p:sld xmlns:a="http://schemas.openxmlformats.org/drawingml/2006/main" xmlns:r="http://schemas.openxmlformats.org/officeDocument/2006/relationships" xmlns:p="http://schemas.openxmlformats.org/presentationml/2006/main">
+  <p:cSld>
+    <p:spTree>
+      <p:nvGrpSpPr>
+        <p:cNvPr id="1" name=""/>
+        <p:cNvGrpSpPr/>
+        <p:nvPr/>
+      </p:nvGrpSpPr>
+      <p:grpSpPr>
+        <a:xfrm>
+          <a:off x="0" y="0"/>
+          <a:ext cx="0" cy="0"/>
+          <a:chOff x="0" y="0"/>
+          <a:chExt cx="0" cy="0"/>
+        </a:xfrm>
+      </p:grpSpPr>
+      <p:sp>
+        <p:nvSpPr>
+          <p:cNvPr id="2" name="Title"/>
+          <p:cNvSpPr/>
+          <p:nvPr/>
+        </p:nvSpPr>
+        <p:spPr>
+          <a:xfrm>
+            <a:off x="400000" y="240000"/>
+            <a:ext cx="8400000" cy="700000"/>
+          </a:xfrm>
+        </p:spPr>
+        <p:txBody>
+          <a:bodyPr/>
+          <a:lstStyle/>
+          <a:p>
+            <a:r>
+              <a:rPr lang="en-US" sz="2800"/>
+              <a:t>Sources and go deeper</a:t>
+            </a:r>
+          </a:p>
+        </p:txBody>
+      </p:sp>
+      <p:sp>
+        <p:nvSpPr>
+          <p:cNvPr id="3" name="Body"/>
+          <p:cNvSpPr/>
+          <p:nvPr/>
+        </p:nvSpPr>
+        <p:spPr>
+          <a:xfrm>
+            <a:off x="400000" y="1000000"/>
+            <a:ext cx="8400000" cy="3800000"/>
+          </a:xfrm>
+        </p:spPr>
+        <p:txBody>
+          <a:bodyPr/>
+          <a:lstStyle/>
+          <a:p>
+            <a:r>
+              <a:rPr lang="en-US" sz="1400"/>
+              <a:t>Teams contact center integration models — learn — https://learn.microsoft.com/en-us/microsoftteams/teams-contact-center — last checked 2026-10</a:t>
+            </a:r>
+          </a:p>
+          <a:p>
+            <a:r>
+              <a:rPr lang="en-US" sz="1400"/>
+              <a:t>Copilot Studio overview — learn — https://learn.microsoft.com/en-us/microsoft-copilot-studio/fundamentals-what-is-copilot-studio — last checked 2026-10</a:t>
+            </a:r>
+          </a:p>
+          <a:p>
+            <a:r>
+              <a:rPr lang="en-US" sz="1400"/>
+              <a:t>Azure AI Foundry documentation — learn — https://learn.microsoft.com/en-us/azure/ai-foundry/ — last checked 2026-10</a:t>
+            </a:r>
+          </a:p>
+          <a:p>
+            <a:r>
+              <a:rPr lang="en-US" sz="1400"/>
+              <a:t>Azure AI Speech overview — learn — https://learn.microsoft.com/en-us/azure/ai-services/speech-service/overview — last checked 2026-10</a:t>
+            </a:r>
+          </a:p>
+        </p:txBody>
+      </p:sp>
+    </p:spTree>
+  </p:cSld>
+  <p:clrMapOvr>
+    <a:masterClrMapping/>
+  </p:clrMapOvr>
+</p:sld>
+</file>
+
+<file path=ppt/slides/slide35.xml><?xml version="1.0" encoding="utf-8"?>
+<p:sld xmlns:a="http://schemas.openxmlformats.org/drawingml/2006/main" xmlns:r="http://schemas.openxmlformats.org/officeDocument/2006/relationships" xmlns:p="http://schemas.openxmlformats.org/presentationml/2006/main">
+  <p:cSld>
+    <p:spTree>
+      <p:nvGrpSpPr>
+        <p:cNvPr id="1" name=""/>
+        <p:cNvGrpSpPr/>
+        <p:nvPr/>
+      </p:nvGrpSpPr>
+      <p:grpSpPr>
+        <a:xfrm>
+          <a:off x="0" y="0"/>
+          <a:ext cx="0" cy="0"/>
+          <a:chOff x="0" y="0"/>
+          <a:chExt cx="0" cy="0"/>
+        </a:xfrm>
+      </p:grpSpPr>
+      <p:sp>
+        <p:nvSpPr>
+          <p:cNvPr id="2" name="Title"/>
+          <p:cNvSpPr/>
+          <p:nvPr/>
+        </p:nvSpPr>
+        <p:spPr>
+          <a:xfrm>
+            <a:off x="400000" y="240000"/>
+            <a:ext cx="8400000" cy="700000"/>
+          </a:xfrm>
+        </p:spPr>
+        <p:txBody>
+          <a:bodyPr/>
+          <a:lstStyle/>
+          <a:p>
+            <a:r>
+              <a:rPr lang="en-US" sz="2800"/>
+              <a:t>Sources and go deeper</a:t>
+            </a:r>
+          </a:p>
+        </p:txBody>
+      </p:sp>
+      <p:sp>
+        <p:nvSpPr>
+          <p:cNvPr id="3" name="Body"/>
+          <p:cNvSpPr/>
+          <p:nvPr/>
+        </p:nvSpPr>
+        <p:spPr>
+          <a:xfrm>
+            <a:off x="400000" y="1000000"/>
+            <a:ext cx="8400000" cy="3800000"/>
+          </a:xfrm>
+        </p:spPr>
+        <p:txBody>
+          <a:bodyPr/>
+          <a:lstStyle/>
+          <a:p>
+            <a:r>
+              <a:rPr lang="en-US" sz="1400"/>
+              <a:t>Study guide MS-700 — learn — https://learn.microsoft.com/en-us/credentials/certifications/resources/study-guides/ms-700 — last checked 2026-10</a:t>
+            </a:r>
+          </a:p>
+          <a:p>
+            <a:r>
+              <a:rPr lang="en-US" sz="1400"/>
+              <a:t>Partner Center July 2026 announcements — learn — https://learn.microsoft.com/en-us/partner-center/announcements/2026-july — last checked 2026-10</a:t>
+            </a:r>
+          </a:p>
+          <a:p>
+            <a:r>
+              <a:rPr lang="en-US" sz="1400"/>
+              <a:t>Azure Fundamentals — learn — https://learn.microsoft.com/en-us/credentials/certifications/azure-fundamentals/ — last checked 2026-10</a:t>
+            </a:r>
+          </a:p>
+          <a:p>
+            <a:r>
+              <a:rPr lang="en-US" sz="1400"/>
+              <a:t>Study guide MB-280 — learn — https://learn.microsoft.com/en-us/credentials/certifications/resources/study-guides/mb-280 — last checked 2026-10</a:t>
+            </a:r>
+          </a:p>
+        </p:txBody>
+      </p:sp>
+    </p:spTree>
+  </p:cSld>
+  <p:clrMapOvr>
+    <a:masterClrMapping/>
+  </p:clrMapOvr>
+</p:sld>
+</file>
+
+<file path=ppt/slides/slide36.xml><?xml version="1.0" encoding="utf-8"?>
+<p:sld xmlns:a="http://schemas.openxmlformats.org/drawingml/2006/main" xmlns:r="http://schemas.openxmlformats.org/officeDocument/2006/relationships" xmlns:p="http://schemas.openxmlformats.org/presentationml/2006/main">
+  <p:cSld>
+    <p:spTree>
+      <p:nvGrpSpPr>
+        <p:cNvPr id="1" name=""/>
+        <p:cNvGrpSpPr/>
+        <p:nvPr/>
+      </p:nvGrpSpPr>
+      <p:grpSpPr>
+        <a:xfrm>
+          <a:off x="0" y="0"/>
+          <a:ext cx="0" cy="0"/>
+          <a:chOff x="0" y="0"/>
+          <a:chExt cx="0" cy="0"/>
+        </a:xfrm>
+      </p:grpSpPr>
+      <p:sp>
+        <p:nvSpPr>
+          <p:cNvPr id="2" name="Title"/>
+          <p:cNvSpPr/>
+          <p:nvPr/>
+        </p:nvSpPr>
+        <p:spPr>
+          <a:xfrm>
+            <a:off x="400000" y="240000"/>
+            <a:ext cx="8400000" cy="700000"/>
+          </a:xfrm>
+        </p:spPr>
+        <p:txBody>
+          <a:bodyPr/>
+          <a:lstStyle/>
+          <a:p>
+            <a:r>
+              <a:rPr lang="en-US" sz="2800"/>
+              <a:t>Sources and go deeper</a:t>
+            </a:r>
+          </a:p>
+        </p:txBody>
+      </p:sp>
+      <p:sp>
+        <p:nvSpPr>
+          <p:cNvPr id="3" name="Body"/>
+          <p:cNvSpPr/>
+          <p:nvPr/>
+        </p:nvSpPr>
+        <p:spPr>
+          <a:xfrm>
+            <a:off x="400000" y="1000000"/>
+            <a:ext cx="8400000" cy="3800000"/>
+          </a:xfrm>
+        </p:spPr>
+        <p:txBody>
+          <a:bodyPr/>
+          <a:lstStyle/>
+          <a:p>
+            <a:r>
+              <a:rPr lang="en-US" sz="1400"/>
+              <a:t>Teams Administrator Associate — learn — https://learn.microsoft.com/en-us/credentials/certifications/m365-teams-administrator-associate/ — last checked 2026-10</a:t>
+            </a:r>
+          </a:p>
+          <a:p>
+            <a:r>
+              <a:rPr lang="en-US" sz="1400"/>
+              <a:t>Introduction to Teams recording — learn — https://learn.microsoft.com/en-us/microsoftteams/teams-recording-policy — last checked 2026-10</a:t>
+            </a:r>
+          </a:p>
+          <a:p>
+            <a:r>
+              <a:rPr lang="en-US" sz="1400"/>
+              <a:t>Set up compliance recording — learn — https://learn.microsoft.com/en-us/microsoftteams/teams-compliance-recording-setup — last checked 2026-10</a:t>
             </a:r>
           </a:p>
         </p:txBody>
@@ -830,16 +2600,16 @@
         </p:nvSpPr>
         <p:spPr>
           <a:xfrm>
-            <a:off x="400000" y="300000"/>
-            <a:ext cx="8000000" cy="800000"/>
-          </a:xfrm>
-        </p:spPr>
-        <p:txBody>
-          <a:bodyPr/>
-          <a:lstStyle/>
-          <a:p>
-            <a:r>
-              <a:rPr lang="en-US" sz="3200"/>
+            <a:off x="400000" y="240000"/>
+            <a:ext cx="8400000" cy="700000"/>
+          </a:xfrm>
+        </p:spPr>
+        <p:txBody>
+          <a:bodyPr/>
+          <a:lstStyle/>
+          <a:p>
+            <a:r>
+              <a:rPr lang="en-US" sz="2800"/>
               <a:t>Network and QoS</a:t>
             </a:r>
           </a:p>
@@ -853,17 +2623,23 @@
         </p:nvSpPr>
         <p:spPr>
           <a:xfrm>
-            <a:off x="400000" y="1400000"/>
-            <a:ext cx="8000000" cy="3000000"/>
-          </a:xfrm>
-        </p:spPr>
-        <p:txBody>
-          <a:bodyPr/>
-          <a:lstStyle/>
-          <a:p>
-            <a:r>
-              <a:rPr lang="en-US" sz="1800"/>
-              <a:t>Teams audio dies in the same queues as file copies unless the path is short and the mark survives. Confirm before relying. Independent free learning-only project.</a:t>
+            <a:off x="400000" y="1000000"/>
+            <a:ext cx="8400000" cy="3800000"/>
+          </a:xfrm>
+        </p:spPr>
+        <p:txBody>
+          <a:bodyPr/>
+          <a:lstStyle/>
+          <a:p>
+            <a:r>
+              <a:rPr lang="en-US" sz="1400"/>
+              <a:t>Teams audio dies in the same queues as file copies unless the path is short and the mark survives. Confirm before relying.</a:t>
+            </a:r>
+          </a:p>
+          <a:p>
+            <a:r>
+              <a:rPr lang="en-US" sz="1400"/>
+              <a:t>Independent free learning-only project.</a:t>
             </a:r>
           </a:p>
         </p:txBody>
@@ -901,16 +2677,16 @@
         </p:nvSpPr>
         <p:spPr>
           <a:xfrm>
-            <a:off x="400000" y="300000"/>
-            <a:ext cx="8000000" cy="800000"/>
-          </a:xfrm>
-        </p:spPr>
-        <p:txBody>
-          <a:bodyPr/>
-          <a:lstStyle/>
-          <a:p>
-            <a:r>
-              <a:rPr lang="en-US" sz="3200"/>
+            <a:off x="400000" y="240000"/>
+            <a:ext cx="8400000" cy="700000"/>
+          </a:xfrm>
+        </p:spPr>
+        <p:txBody>
+          <a:bodyPr/>
+          <a:lstStyle/>
+          <a:p>
+            <a:r>
+              <a:rPr lang="en-US" sz="2800"/>
               <a:t>PSTN connectivity</a:t>
             </a:r>
           </a:p>
@@ -924,17 +2700,23 @@
         </p:nvSpPr>
         <p:spPr>
           <a:xfrm>
-            <a:off x="400000" y="1400000"/>
-            <a:ext cx="8000000" cy="3000000"/>
-          </a:xfrm>
-        </p:spPr>
-        <p:txBody>
-          <a:bodyPr/>
-          <a:lstStyle/>
-          <a:p>
-            <a:r>
-              <a:rPr lang="en-US" sz="1800"/>
-              <a:t>Every external call uses one of four connectivity options. Mixing them is allowed. Pretending they are the same license is not. Confirm before relying. Independent free learning-only project.</a:t>
+            <a:off x="400000" y="1000000"/>
+            <a:ext cx="8400000" cy="3800000"/>
+          </a:xfrm>
+        </p:spPr>
+        <p:txBody>
+          <a:bodyPr/>
+          <a:lstStyle/>
+          <a:p>
+            <a:r>
+              <a:rPr lang="en-US" sz="1400"/>
+              <a:t>Every external call uses one of four connectivity options. Mixing them is allowed. Pretending they are the same license is not. Confirm before relying.</a:t>
+            </a:r>
+          </a:p>
+          <a:p>
+            <a:r>
+              <a:rPr lang="en-US" sz="1400"/>
+              <a:t>Independent free learning-only project.</a:t>
             </a:r>
           </a:p>
         </p:txBody>
@@ -972,16 +2754,16 @@
         </p:nvSpPr>
         <p:spPr>
           <a:xfrm>
-            <a:off x="400000" y="300000"/>
-            <a:ext cx="8000000" cy="800000"/>
-          </a:xfrm>
-        </p:spPr>
-        <p:txBody>
-          <a:bodyPr/>
-          <a:lstStyle/>
-          <a:p>
-            <a:r>
-              <a:rPr lang="en-US" sz="3200"/>
+            <a:off x="400000" y="240000"/>
+            <a:ext cx="8400000" cy="700000"/>
+          </a:xfrm>
+        </p:spPr>
+        <p:txBody>
+          <a:bodyPr/>
+          <a:lstStyle/>
+          <a:p>
+            <a:r>
+              <a:rPr lang="en-US" sz="2800"/>
               <a:t>Routing and dial plans</a:t>
             </a:r>
           </a:p>
@@ -995,17 +2777,23 @@
         </p:nvSpPr>
         <p:spPr>
           <a:xfrm>
-            <a:off x="400000" y="1400000"/>
-            <a:ext cx="8000000" cy="3000000"/>
-          </a:xfrm>
-        </p:spPr>
-        <p:txBody>
-          <a:bodyPr/>
-          <a:lstStyle/>
-          <a:p>
-            <a:r>
-              <a:rPr lang="en-US" sz="1800"/>
-              <a:t>Normalization and routing are two steps. A number that is not E.164 never gets a fair chance at a voice route. Confirm before relying. Independent free learning-only project.</a:t>
+            <a:off x="400000" y="1000000"/>
+            <a:ext cx="8400000" cy="3800000"/>
+          </a:xfrm>
+        </p:spPr>
+        <p:txBody>
+          <a:bodyPr/>
+          <a:lstStyle/>
+          <a:p>
+            <a:r>
+              <a:rPr lang="en-US" sz="1400"/>
+              <a:t>Normalization and routing are two steps. A number that is not E.164 never gets a fair chance at a voice route. Confirm before relying.</a:t>
+            </a:r>
+          </a:p>
+          <a:p>
+            <a:r>
+              <a:rPr lang="en-US" sz="1400"/>
+              <a:t>Independent free learning-only project.</a:t>
             </a:r>
           </a:p>
         </p:txBody>
@@ -1043,16 +2831,16 @@
         </p:nvSpPr>
         <p:spPr>
           <a:xfrm>
-            <a:off x="400000" y="300000"/>
-            <a:ext cx="8000000" cy="800000"/>
-          </a:xfrm>
-        </p:spPr>
-        <p:txBody>
-          <a:bodyPr/>
-          <a:lstStyle/>
-          <a:p>
-            <a:r>
-              <a:rPr lang="en-US" sz="3200"/>
+            <a:off x="400000" y="240000"/>
+            <a:ext cx="8400000" cy="700000"/>
+          </a:xfrm>
+        </p:spPr>
+        <p:txBody>
+          <a:bodyPr/>
+          <a:lstStyle/>
+          <a:p>
+            <a:r>
+              <a:rPr lang="en-US" sz="2800"/>
               <a:t>Attendants and queues</a:t>
             </a:r>
           </a:p>
@@ -1066,17 +2854,23 @@
         </p:nvSpPr>
         <p:spPr>
           <a:xfrm>
-            <a:off x="400000" y="1400000"/>
-            <a:ext cx="8000000" cy="3000000"/>
-          </a:xfrm>
-        </p:spPr>
-        <p:txBody>
-          <a:bodyPr/>
-          <a:lstStyle/>
-          <a:p>
-            <a:r>
-              <a:rPr lang="en-US" sz="1800"/>
-              <a:t>The number people publish is often a voice app, not a human. The resource account is the identity of that app. Confirm before relying. Independent free learning-only project.</a:t>
+            <a:off x="400000" y="1000000"/>
+            <a:ext cx="8400000" cy="3800000"/>
+          </a:xfrm>
+        </p:spPr>
+        <p:txBody>
+          <a:bodyPr/>
+          <a:lstStyle/>
+          <a:p>
+            <a:r>
+              <a:rPr lang="en-US" sz="1400"/>
+              <a:t>The number people publish is often a voice app, not a human. The resource account is the identity of that app. Confirm before relying.</a:t>
+            </a:r>
+          </a:p>
+          <a:p>
+            <a:r>
+              <a:rPr lang="en-US" sz="1400"/>
+              <a:t>Independent free learning-only project.</a:t>
             </a:r>
           </a:p>
         </p:txBody>
@@ -1114,16 +2908,16 @@
         </p:nvSpPr>
         <p:spPr>
           <a:xfrm>
-            <a:off x="400000" y="300000"/>
-            <a:ext cx="8000000" cy="800000"/>
-          </a:xfrm>
-        </p:spPr>
-        <p:txBody>
-          <a:bodyPr/>
-          <a:lstStyle/>
-          <a:p>
-            <a:r>
-              <a:rPr lang="en-US" sz="3200"/>
+            <a:off x="400000" y="240000"/>
+            <a:ext cx="8400000" cy="700000"/>
+          </a:xfrm>
+        </p:spPr>
+        <p:txBody>
+          <a:bodyPr/>
+          <a:lstStyle/>
+          <a:p>
+            <a:r>
+              <a:rPr lang="en-US" sz="2800"/>
               <a:t>Emergency, LBR, survivability</a:t>
             </a:r>
           </a:p>
@@ -1137,17 +2931,23 @@
         </p:nvSpPr>
         <p:spPr>
           <a:xfrm>
-            <a:off x="400000" y="1400000"/>
-            <a:ext cx="8000000" cy="3000000"/>
-          </a:xfrm>
-        </p:spPr>
-        <p:txBody>
-          <a:bodyPr/>
-          <a:lstStyle/>
-          <a:p>
-            <a:r>
-              <a:rPr lang="en-US" sz="1800"/>
-              <a:t>Emergency calling is a design gate, not a checkbox after go-live. Location-based routing and branch survivability use the same network map. Confirm before relying. Independent free learning-only project.</a:t>
+            <a:off x="400000" y="1000000"/>
+            <a:ext cx="8400000" cy="3800000"/>
+          </a:xfrm>
+        </p:spPr>
+        <p:txBody>
+          <a:bodyPr/>
+          <a:lstStyle/>
+          <a:p>
+            <a:r>
+              <a:rPr lang="en-US" sz="1400"/>
+              <a:t>Emergency calling is a design gate, not a checkbox after go-live. Location-based routing and branch survivability use the same network map. Confirm before relying.</a:t>
+            </a:r>
+          </a:p>
+          <a:p>
+            <a:r>
+              <a:rPr lang="en-US" sz="1400"/>
+              <a:t>Independent free learning-only project.</a:t>
             </a:r>
           </a:p>
         </p:txBody>
@@ -1185,16 +2985,16 @@
         </p:nvSpPr>
         <p:spPr>
           <a:xfrm>
-            <a:off x="400000" y="300000"/>
-            <a:ext cx="8000000" cy="800000"/>
-          </a:xfrm>
-        </p:spPr>
-        <p:txBody>
-          <a:bodyPr/>
-          <a:lstStyle/>
-          <a:p>
-            <a:r>
-              <a:rPr lang="en-US" sz="3200"/>
+            <a:off x="400000" y="240000"/>
+            <a:ext cx="8400000" cy="700000"/>
+          </a:xfrm>
+        </p:spPr>
+        <p:txBody>
+          <a:bodyPr/>
+          <a:lstStyle/>
+          <a:p>
+            <a:r>
+              <a:rPr lang="en-US" sz="2800"/>
               <a:t>Devices and media</a:t>
             </a:r>
           </a:p>
@@ -1208,17 +3008,23 @@
         </p:nvSpPr>
         <p:spPr>
           <a:xfrm>
-            <a:off x="400000" y="1400000"/>
-            <a:ext cx="8000000" cy="3000000"/>
-          </a:xfrm>
-        </p:spPr>
-        <p:txBody>
-          <a:bodyPr/>
-          <a:lstStyle/>
-          <a:p>
-            <a:r>
-              <a:rPr lang="en-US" sz="1800"/>
-              <a:t>Phones, rooms, and media bypass change where RTP flows. Signaling still belongs to Teams. Confirm before relying. Independent free learning-only project.</a:t>
+            <a:off x="400000" y="1000000"/>
+            <a:ext cx="8400000" cy="3800000"/>
+          </a:xfrm>
+        </p:spPr>
+        <p:txBody>
+          <a:bodyPr/>
+          <a:lstStyle/>
+          <a:p>
+            <a:r>
+              <a:rPr lang="en-US" sz="1400"/>
+              <a:t>Phones, rooms, and media bypass change where RTP flows. Signaling still belongs to Teams. Confirm before relying.</a:t>
+            </a:r>
+          </a:p>
+          <a:p>
+            <a:r>
+              <a:rPr lang="en-US" sz="1400"/>
+              <a:t>Independent free learning-only project.</a:t>
             </a:r>
           </a:p>
         </p:txBody>

--- a/downloads/teams-phone-deck.pptx
+++ b/downloads/teams-phone-deck.pptx
@@ -1049,7 +1049,7 @@
           <a:p>
             <a:r>
               <a:rPr lang="en-US" sz="1400"/>
-              <a:t>Cloud Voicemail — confirm — https://learn.microsoft.com/en-us/microsoftteams/cloud-voicemail — last checked 2026-10. Did not open when checked.</a:t>
+              <a:t>Cloud Voicemail — confirm — last checked 2026-10. Did not open when checked.</a:t>
             </a:r>
           </a:p>
           <a:p>
@@ -1500,7 +1500,7 @@
           <a:p>
             <a:r>
               <a:rPr lang="en-US" sz="1400"/>
-              <a:t>Plan Teams Phone Mobile — confirm — https://learn.microsoft.com/en-us/microsoftteams/teams-phone-mobile-plan — last checked 2026-10. Did not open when checked.</a:t>
+              <a:t>Plan Teams Phone Mobile — confirm — last checked 2026-10. Did not open when checked.</a:t>
             </a:r>
           </a:p>
           <a:p>
@@ -1779,7 +1779,7 @@
           <a:p>
             <a:r>
               <a:rPr lang="en-US" sz="1400"/>
-              <a:t>AudioCodes session border controllers — confirm — https://www.audiocodes.com/solutions-products/products/session-border-controllers — last checked 2026-10. Did not open when checked.</a:t>
+              <a:t>AudioCodes session border controllers — confirm — last checked 2026-10. Did not open when checked.</a:t>
             </a:r>
           </a:p>
         </p:txBody>
@@ -1862,13 +1862,13 @@
           <a:p>
             <a:r>
               <a:rPr lang="en-US" sz="1400"/>
-              <a:t>Cisco Unified Border Element — vendor — https://www.cisco.com/c/en/us/products/unified-communications/unified-border-element/index.html — last checked 2026-10</a:t>
-            </a:r>
-          </a:p>
-          <a:p>
-            <a:r>
-              <a:rPr lang="en-US" sz="1400"/>
-              <a:t>Oracle Session Border Controller — confirm — https://www.oracle.com/communications/session-border-controller/ — last checked 2026-10. Did not open when checked.</a:t>
+              <a:t>Cisco Unified Border Element — confirm — last checked 2026-10. Did not open when checked.</a:t>
+            </a:r>
+          </a:p>
+          <a:p>
+            <a:r>
+              <a:rPr lang="en-US" sz="1400"/>
+              <a:t>Oracle Session Border Controller — confirm — last checked 2026-10. Did not open when checked.</a:t>
             </a:r>
           </a:p>
         </p:txBody>
